--- a/media/module5/slides.pptx
+++ b/media/module5/slides.pptx
@@ -22,6 +22,20 @@
     <p:sldId id="270" r:id="rId22"/>
     <p:sldId id="271" r:id="rId23"/>
     <p:sldId id="272" r:id="rId24"/>
+    <p:sldId id="273" r:id="rId25"/>
+    <p:sldId id="274" r:id="rId26"/>
+    <p:sldId id="275" r:id="rId27"/>
+    <p:sldId id="276" r:id="rId28"/>
+    <p:sldId id="277" r:id="rId29"/>
+    <p:sldId id="278" r:id="rId30"/>
+    <p:sldId id="279" r:id="rId31"/>
+    <p:sldId id="280" r:id="rId32"/>
+    <p:sldId id="281" r:id="rId33"/>
+    <p:sldId id="282" r:id="rId34"/>
+    <p:sldId id="283" r:id="rId35"/>
+    <p:sldId id="284" r:id="rId36"/>
+    <p:sldId id="285" r:id="rId37"/>
+    <p:sldId id="286" r:id="rId38"/>
   </p:sldIdLst>
   <p:sldSz cx="12191695" cy="6858000" type="screen4x3"/>
   <p:notesSz cx="6858000" cy="9144000"/>
@@ -518,7 +532,287 @@
           <a:lstStyle/>
           <a:p>
             <a:r>
-              <a:t>From MODULE5 Topics Covered.</a:t>
+              <a:t>From docs/MODULE5.md — read guides before running demos.</a:t>
+            </a:r>
+          </a:p>
+        </p:txBody>
+      </p:sp>
+      <p:sp>
+        <p:nvSpPr>
+          <p:cNvPr id="4" name="Slide Number Placeholder 3"/>
+          <p:cNvSpPr>
+            <a:spLocks noGrp="1"/>
+          </p:cNvSpPr>
+          <p:nvPr>
+            <p:ph type="sldNum" idx="5" sz="quarter"/>
+          </p:nvPr>
+        </p:nvSpPr>
+        <p:spPr/>
+      </p:sp>
+    </p:spTree>
+  </p:cSld>
+  <p:clrMapOvr>
+    <a:masterClrMapping/>
+  </p:clrMapOvr>
+</p:notes>
+</file>
+
+<file path=ppt/notesSlides/notesSlide10.xml><?xml version="1.0" encoding="utf-8"?>
+<p:notes xmlns:a="http://schemas.openxmlformats.org/drawingml/2006/main" xmlns:p="http://schemas.openxmlformats.org/presentationml/2006/main" xmlns:r="http://schemas.openxmlformats.org/officeDocument/2006/relationships">
+  <p:cSld>
+    <p:spTree>
+      <p:nvGrpSpPr>
+        <p:cNvPr id="1" name=""/>
+        <p:cNvGrpSpPr/>
+        <p:nvPr/>
+      </p:nvGrpSpPr>
+      <p:grpSpPr>
+        <a:xfrm>
+          <a:off x="0" y="0"/>
+          <a:ext cx="0" cy="0"/>
+          <a:chOff x="0" y="0"/>
+          <a:chExt cx="0" cy="0"/>
+        </a:xfrm>
+      </p:grpSpPr>
+      <p:sp>
+        <p:nvSpPr>
+          <p:cNvPr id="2" name="Slide Image Placeholder 1"/>
+          <p:cNvSpPr>
+            <a:spLocks noGrp="1"/>
+          </p:cNvSpPr>
+          <p:nvPr>
+            <p:ph type="sldImg" idx="2"/>
+          </p:nvPr>
+        </p:nvSpPr>
+        <p:spPr/>
+      </p:sp>
+      <p:sp>
+        <p:nvSpPr>
+          <p:cNvPr id="3" name="Notes Placeholder 2"/>
+          <p:cNvSpPr>
+            <a:spLocks noGrp="1"/>
+          </p:cNvSpPr>
+          <p:nvPr>
+            <p:ph type="body" idx="3" sz="quarter"/>
+          </p:nvPr>
+        </p:nvSpPr>
+        <p:spPr/>
+        <p:txBody>
+          <a:bodyPr/>
+          <a:lstStyle/>
+          <a:p>
+            <a:r>
+              <a:t>Run from course repository root.</a:t>
+            </a:r>
+          </a:p>
+        </p:txBody>
+      </p:sp>
+      <p:sp>
+        <p:nvSpPr>
+          <p:cNvPr id="4" name="Slide Number Placeholder 3"/>
+          <p:cNvSpPr>
+            <a:spLocks noGrp="1"/>
+          </p:cNvSpPr>
+          <p:nvPr>
+            <p:ph type="sldNum" idx="5" sz="quarter"/>
+          </p:nvPr>
+        </p:nvSpPr>
+        <p:spPr/>
+      </p:sp>
+    </p:spTree>
+  </p:cSld>
+  <p:clrMapOvr>
+    <a:masterClrMapping/>
+  </p:clrMapOvr>
+</p:notes>
+</file>
+
+<file path=ppt/notesSlides/notesSlide11.xml><?xml version="1.0" encoding="utf-8"?>
+<p:notes xmlns:a="http://schemas.openxmlformats.org/drawingml/2006/main" xmlns:p="http://schemas.openxmlformats.org/presentationml/2006/main" xmlns:r="http://schemas.openxmlformats.org/officeDocument/2006/relationships">
+  <p:cSld>
+    <p:spTree>
+      <p:nvGrpSpPr>
+        <p:cNvPr id="1" name=""/>
+        <p:cNvGrpSpPr/>
+        <p:nvPr/>
+      </p:nvGrpSpPr>
+      <p:grpSpPr>
+        <a:xfrm>
+          <a:off x="0" y="0"/>
+          <a:ext cx="0" cy="0"/>
+          <a:chOff x="0" y="0"/>
+          <a:chExt cx="0" cy="0"/>
+        </a:xfrm>
+      </p:grpSpPr>
+      <p:sp>
+        <p:nvSpPr>
+          <p:cNvPr id="2" name="Slide Image Placeholder 1"/>
+          <p:cNvSpPr>
+            <a:spLocks noGrp="1"/>
+          </p:cNvSpPr>
+          <p:nvPr>
+            <p:ph type="sldImg" idx="2"/>
+          </p:nvPr>
+        </p:nvSpPr>
+        <p:spPr/>
+      </p:sp>
+      <p:sp>
+        <p:nvSpPr>
+          <p:cNvPr id="3" name="Notes Placeholder 2"/>
+          <p:cNvSpPr>
+            <a:spLocks noGrp="1"/>
+          </p:cNvSpPr>
+          <p:nvPr>
+            <p:ph type="body" idx="3" sz="quarter"/>
+          </p:nvPr>
+        </p:nvSpPr>
+        <p:spPr/>
+        <p:txBody>
+          <a:bodyPr/>
+          <a:lstStyle/>
+          <a:p>
+            <a:r>
+              <a:t>module5/examples/examples/spi_baseline/README.md</a:t>
+            </a:r>
+          </a:p>
+        </p:txBody>
+      </p:sp>
+      <p:sp>
+        <p:nvSpPr>
+          <p:cNvPr id="4" name="Slide Number Placeholder 3"/>
+          <p:cNvSpPr>
+            <a:spLocks noGrp="1"/>
+          </p:cNvSpPr>
+          <p:nvPr>
+            <p:ph type="sldNum" idx="5" sz="quarter"/>
+          </p:nvPr>
+        </p:nvSpPr>
+        <p:spPr/>
+      </p:sp>
+    </p:spTree>
+  </p:cSld>
+  <p:clrMapOvr>
+    <a:masterClrMapping/>
+  </p:clrMapOvr>
+</p:notes>
+</file>
+
+<file path=ppt/notesSlides/notesSlide12.xml><?xml version="1.0" encoding="utf-8"?>
+<p:notes xmlns:a="http://schemas.openxmlformats.org/drawingml/2006/main" xmlns:p="http://schemas.openxmlformats.org/presentationml/2006/main" xmlns:r="http://schemas.openxmlformats.org/officeDocument/2006/relationships">
+  <p:cSld>
+    <p:spTree>
+      <p:nvGrpSpPr>
+        <p:cNvPr id="1" name=""/>
+        <p:cNvGrpSpPr/>
+        <p:nvPr/>
+      </p:nvGrpSpPr>
+      <p:grpSpPr>
+        <a:xfrm>
+          <a:off x="0" y="0"/>
+          <a:ext cx="0" cy="0"/>
+          <a:chOff x="0" y="0"/>
+          <a:chExt cx="0" cy="0"/>
+        </a:xfrm>
+      </p:grpSpPr>
+      <p:sp>
+        <p:nvSpPr>
+          <p:cNvPr id="2" name="Slide Image Placeholder 1"/>
+          <p:cNvSpPr>
+            <a:spLocks noGrp="1"/>
+          </p:cNvSpPr>
+          <p:nvPr>
+            <p:ph type="sldImg" idx="2"/>
+          </p:nvPr>
+        </p:nvSpPr>
+        <p:spPr/>
+      </p:sp>
+      <p:sp>
+        <p:nvSpPr>
+          <p:cNvPr id="3" name="Notes Placeholder 2"/>
+          <p:cNvSpPr>
+            <a:spLocks noGrp="1"/>
+          </p:cNvSpPr>
+          <p:nvPr>
+            <p:ph type="body" idx="3" sz="quarter"/>
+          </p:nvPr>
+        </p:nvSpPr>
+        <p:spPr/>
+        <p:txBody>
+          <a:bodyPr/>
+          <a:lstStyle/>
+          <a:p>
+            <a:r>
+              <a:t>Hands-on: module5/examples/examples/spi_baseline/</a:t>
+            </a:r>
+          </a:p>
+        </p:txBody>
+      </p:sp>
+      <p:sp>
+        <p:nvSpPr>
+          <p:cNvPr id="4" name="Slide Number Placeholder 3"/>
+          <p:cNvSpPr>
+            <a:spLocks noGrp="1"/>
+          </p:cNvSpPr>
+          <p:nvPr>
+            <p:ph type="sldNum" idx="5" sz="quarter"/>
+          </p:nvPr>
+        </p:nvSpPr>
+        <p:spPr/>
+      </p:sp>
+    </p:spTree>
+  </p:cSld>
+  <p:clrMapOvr>
+    <a:masterClrMapping/>
+  </p:clrMapOvr>
+</p:notes>
+</file>
+
+<file path=ppt/notesSlides/notesSlide13.xml><?xml version="1.0" encoding="utf-8"?>
+<p:notes xmlns:a="http://schemas.openxmlformats.org/drawingml/2006/main" xmlns:p="http://schemas.openxmlformats.org/presentationml/2006/main" xmlns:r="http://schemas.openxmlformats.org/officeDocument/2006/relationships">
+  <p:cSld>
+    <p:spTree>
+      <p:nvGrpSpPr>
+        <p:cNvPr id="1" name=""/>
+        <p:cNvGrpSpPr/>
+        <p:nvPr/>
+      </p:nvGrpSpPr>
+      <p:grpSpPr>
+        <a:xfrm>
+          <a:off x="0" y="0"/>
+          <a:ext cx="0" cy="0"/>
+          <a:chOff x="0" y="0"/>
+          <a:chExt cx="0" cy="0"/>
+        </a:xfrm>
+      </p:grpSpPr>
+      <p:sp>
+        <p:nvSpPr>
+          <p:cNvPr id="2" name="Slide Image Placeholder 1"/>
+          <p:cNvSpPr>
+            <a:spLocks noGrp="1"/>
+          </p:cNvSpPr>
+          <p:nvPr>
+            <p:ph type="sldImg" idx="2"/>
+          </p:nvPr>
+        </p:nvSpPr>
+        <p:spPr/>
+      </p:sp>
+      <p:sp>
+        <p:nvSpPr>
+          <p:cNvPr id="3" name="Notes Placeholder 2"/>
+          <p:cNvSpPr>
+            <a:spLocks noGrp="1"/>
+          </p:cNvSpPr>
+          <p:nvPr>
+            <p:ph type="body" idx="3" sz="quarter"/>
+          </p:nvPr>
+        </p:nvSpPr>
+        <p:spPr/>
+        <p:txBody>
+          <a:bodyPr/>
+          <a:lstStyle/>
+          <a:p>
+            <a:r>
+              <a:t>From MODULE5 Learning Outcomes.</a:t>
             </a:r>
           </a:p>
         </p:txBody>
@@ -588,7 +882,7 @@
           <a:lstStyle/>
           <a:p>
             <a:r>
-              <a:t>From MODULE5 Topics Covered.</a:t>
+              <a:t>From MODULE5 Design Architecture.</a:t>
             </a:r>
           </a:p>
         </p:txBody>
@@ -658,7 +952,7 @@
           <a:lstStyle/>
           <a:p>
             <a:r>
-              <a:t>From MODULE5 Topics Covered.</a:t>
+              <a:t>From MODULE5 Design Architecture.</a:t>
             </a:r>
           </a:p>
         </p:txBody>
@@ -728,7 +1022,7 @@
           <a:lstStyle/>
           <a:p>
             <a:r>
-              <a:t>Run from course repository root.</a:t>
+              <a:t>From MODULE5 Design Architecture.</a:t>
             </a:r>
           </a:p>
         </p:txBody>
@@ -798,7 +1092,7 @@
           <a:lstStyle/>
           <a:p>
             <a:r>
-              <a:t>module5/examples/spi_baseline/README.md</a:t>
+              <a:t>From MODULE5 Verification &amp; Testing Methods.</a:t>
             </a:r>
           </a:p>
         </p:txBody>
@@ -868,7 +1162,217 @@
           <a:lstStyle/>
           <a:p>
             <a:r>
-              <a:t>Hands-on: module5/examples/spi_baseline/</a:t>
+              <a:t>From MODULE5 Verification &amp; Testing Methods.</a:t>
+            </a:r>
+          </a:p>
+        </p:txBody>
+      </p:sp>
+      <p:sp>
+        <p:nvSpPr>
+          <p:cNvPr id="4" name="Slide Number Placeholder 3"/>
+          <p:cNvSpPr>
+            <a:spLocks noGrp="1"/>
+          </p:cNvSpPr>
+          <p:nvPr>
+            <p:ph type="sldNum" idx="5" sz="quarter"/>
+          </p:nvPr>
+        </p:nvSpPr>
+        <p:spPr/>
+      </p:sp>
+    </p:spTree>
+  </p:cSld>
+  <p:clrMapOvr>
+    <a:masterClrMapping/>
+  </p:clrMapOvr>
+</p:notes>
+</file>
+
+<file path=ppt/notesSlides/notesSlide7.xml><?xml version="1.0" encoding="utf-8"?>
+<p:notes xmlns:a="http://schemas.openxmlformats.org/drawingml/2006/main" xmlns:p="http://schemas.openxmlformats.org/presentationml/2006/main" xmlns:r="http://schemas.openxmlformats.org/officeDocument/2006/relationships">
+  <p:cSld>
+    <p:spTree>
+      <p:nvGrpSpPr>
+        <p:cNvPr id="1" name=""/>
+        <p:cNvGrpSpPr/>
+        <p:nvPr/>
+      </p:nvGrpSpPr>
+      <p:grpSpPr>
+        <a:xfrm>
+          <a:off x="0" y="0"/>
+          <a:ext cx="0" cy="0"/>
+          <a:chOff x="0" y="0"/>
+          <a:chExt cx="0" cy="0"/>
+        </a:xfrm>
+      </p:grpSpPr>
+      <p:sp>
+        <p:nvSpPr>
+          <p:cNvPr id="2" name="Slide Image Placeholder 1"/>
+          <p:cNvSpPr>
+            <a:spLocks noGrp="1"/>
+          </p:cNvSpPr>
+          <p:nvPr>
+            <p:ph type="sldImg" idx="2"/>
+          </p:nvPr>
+        </p:nvSpPr>
+        <p:spPr/>
+      </p:sp>
+      <p:sp>
+        <p:nvSpPr>
+          <p:cNvPr id="3" name="Notes Placeholder 2"/>
+          <p:cNvSpPr>
+            <a:spLocks noGrp="1"/>
+          </p:cNvSpPr>
+          <p:nvPr>
+            <p:ph type="body" idx="3" sz="quarter"/>
+          </p:nvPr>
+        </p:nvSpPr>
+        <p:spPr/>
+        <p:txBody>
+          <a:bodyPr/>
+          <a:lstStyle/>
+          <a:p>
+            <a:r>
+              <a:t>From MODULE5 Verification &amp; Testing Methods.</a:t>
+            </a:r>
+          </a:p>
+        </p:txBody>
+      </p:sp>
+      <p:sp>
+        <p:nvSpPr>
+          <p:cNvPr id="4" name="Slide Number Placeholder 3"/>
+          <p:cNvSpPr>
+            <a:spLocks noGrp="1"/>
+          </p:cNvSpPr>
+          <p:nvPr>
+            <p:ph type="sldNum" idx="5" sz="quarter"/>
+          </p:nvPr>
+        </p:nvSpPr>
+        <p:spPr/>
+      </p:sp>
+    </p:spTree>
+  </p:cSld>
+  <p:clrMapOvr>
+    <a:masterClrMapping/>
+  </p:clrMapOvr>
+</p:notes>
+</file>
+
+<file path=ppt/notesSlides/notesSlide8.xml><?xml version="1.0" encoding="utf-8"?>
+<p:notes xmlns:a="http://schemas.openxmlformats.org/drawingml/2006/main" xmlns:p="http://schemas.openxmlformats.org/presentationml/2006/main" xmlns:r="http://schemas.openxmlformats.org/officeDocument/2006/relationships">
+  <p:cSld>
+    <p:spTree>
+      <p:nvGrpSpPr>
+        <p:cNvPr id="1" name=""/>
+        <p:cNvGrpSpPr/>
+        <p:nvPr/>
+      </p:nvGrpSpPr>
+      <p:grpSpPr>
+        <a:xfrm>
+          <a:off x="0" y="0"/>
+          <a:ext cx="0" cy="0"/>
+          <a:chOff x="0" y="0"/>
+          <a:chExt cx="0" cy="0"/>
+        </a:xfrm>
+      </p:grpSpPr>
+      <p:sp>
+        <p:nvSpPr>
+          <p:cNvPr id="2" name="Slide Image Placeholder 1"/>
+          <p:cNvSpPr>
+            <a:spLocks noGrp="1"/>
+          </p:cNvSpPr>
+          <p:nvPr>
+            <p:ph type="sldImg" idx="2"/>
+          </p:nvPr>
+        </p:nvSpPr>
+        <p:spPr/>
+      </p:sp>
+      <p:sp>
+        <p:nvSpPr>
+          <p:cNvPr id="3" name="Notes Placeholder 2"/>
+          <p:cNvSpPr>
+            <a:spLocks noGrp="1"/>
+          </p:cNvSpPr>
+          <p:nvPr>
+            <p:ph type="body" idx="3" sz="quarter"/>
+          </p:nvPr>
+        </p:nvSpPr>
+        <p:spPr/>
+        <p:txBody>
+          <a:bodyPr/>
+          <a:lstStyle/>
+          <a:p>
+            <a:r>
+              <a:t>From MODULE5 Topics Covered.</a:t>
+            </a:r>
+          </a:p>
+        </p:txBody>
+      </p:sp>
+      <p:sp>
+        <p:nvSpPr>
+          <p:cNvPr id="4" name="Slide Number Placeholder 3"/>
+          <p:cNvSpPr>
+            <a:spLocks noGrp="1"/>
+          </p:cNvSpPr>
+          <p:nvPr>
+            <p:ph type="sldNum" idx="5" sz="quarter"/>
+          </p:nvPr>
+        </p:nvSpPr>
+        <p:spPr/>
+      </p:sp>
+    </p:spTree>
+  </p:cSld>
+  <p:clrMapOvr>
+    <a:masterClrMapping/>
+  </p:clrMapOvr>
+</p:notes>
+</file>
+
+<file path=ppt/notesSlides/notesSlide9.xml><?xml version="1.0" encoding="utf-8"?>
+<p:notes xmlns:a="http://schemas.openxmlformats.org/drawingml/2006/main" xmlns:p="http://schemas.openxmlformats.org/presentationml/2006/main" xmlns:r="http://schemas.openxmlformats.org/officeDocument/2006/relationships">
+  <p:cSld>
+    <p:spTree>
+      <p:nvGrpSpPr>
+        <p:cNvPr id="1" name=""/>
+        <p:cNvGrpSpPr/>
+        <p:nvPr/>
+      </p:nvGrpSpPr>
+      <p:grpSpPr>
+        <a:xfrm>
+          <a:off x="0" y="0"/>
+          <a:ext cx="0" cy="0"/>
+          <a:chOff x="0" y="0"/>
+          <a:chExt cx="0" cy="0"/>
+        </a:xfrm>
+      </p:grpSpPr>
+      <p:sp>
+        <p:nvSpPr>
+          <p:cNvPr id="2" name="Slide Image Placeholder 1"/>
+          <p:cNvSpPr>
+            <a:spLocks noGrp="1"/>
+          </p:cNvSpPr>
+          <p:nvPr>
+            <p:ph type="sldImg" idx="2"/>
+          </p:nvPr>
+        </p:nvSpPr>
+        <p:spPr/>
+      </p:sp>
+      <p:sp>
+        <p:nvSpPr>
+          <p:cNvPr id="3" name="Notes Placeholder 2"/>
+          <p:cNvSpPr>
+            <a:spLocks noGrp="1"/>
+          </p:cNvSpPr>
+          <p:nvPr>
+            <p:ph type="body" idx="3" sz="quarter"/>
+          </p:nvPr>
+        </p:nvSpPr>
+        <p:spPr/>
+        <p:txBody>
+          <a:bodyPr/>
+          <a:lstStyle/>
+          <a:p>
+            <a:r>
+              <a:t>From MODULE5 Topics Covered.</a:t>
             </a:r>
           </a:p>
         </p:txBody>
@@ -4000,8 +4504,8 @@
         </p:nvSpPr>
         <p:spPr>
           <a:xfrm>
-            <a:off x="548640" y="2743200"/>
-            <a:ext cx="11064240" cy="1371600"/>
+            <a:off x="548640" y="411480"/>
+            <a:ext cx="11064240" cy="777240"/>
           </a:xfrm>
           <a:prstGeom prst="rect">
             <a:avLst/>
@@ -4014,11 +4518,11 @@
           </a:bodyPr>
           <a:lstStyle/>
           <a:p>
-            <a:pPr algn="ctr">
-              <a:lnSpc>
-                <a:spcPts val="2200"/>
-              </a:lnSpc>
-              <a:defRPr sz="3600" b="1">
+            <a:pPr>
+              <a:lnSpc>
+                <a:spcPts val="2200"/>
+              </a:lnSpc>
+              <a:defRPr sz="2800" b="1">
                 <a:solidFill>
                   <a:srgbClr val="1A1A2E"/>
                 </a:solidFill>
@@ -4026,14 +4530,77 @@
               </a:defRPr>
             </a:pPr>
             <a:r>
-              <a:t>Hands-on examples</a:t>
-            </a:r>
-          </a:p>
-        </p:txBody>
-      </p:sp>
-      <p:sp>
-        <p:nvSpPr>
-          <p:cNvPr id="3" name="TextBox 2"/>
+              <a:t>Verification environment architecture</a:t>
+            </a:r>
+          </a:p>
+        </p:txBody>
+      </p:sp>
+      <p:pic>
+        <p:nvPicPr>
+          <p:cNvPr id="3" name="Picture 2" descr="verification_architecture.png"/>
+          <p:cNvPicPr>
+            <a:picLocks noChangeAspect="1"/>
+          </p:cNvPicPr>
+          <p:nvPr/>
+        </p:nvPicPr>
+        <p:blipFill>
+          <a:blip r:embed="rId2"/>
+          <a:stretch>
+            <a:fillRect/>
+          </a:stretch>
+        </p:blipFill>
+        <p:spPr>
+          <a:xfrm>
+            <a:off x="548640" y="1143000"/>
+            <a:ext cx="8128000" cy="4572000"/>
+          </a:xfrm>
+          <a:prstGeom prst="rect">
+            <a:avLst/>
+          </a:prstGeom>
+        </p:spPr>
+      </p:pic>
+      <p:sp>
+        <p:nvSpPr>
+          <p:cNvPr id="4" name="TextBox 3"/>
+          <p:cNvSpPr txBox="1"/>
+          <p:nvPr/>
+        </p:nvSpPr>
+        <p:spPr>
+          <a:xfrm>
+            <a:off x="548640" y="5897880"/>
+            <a:ext cx="11064240" cy="411480"/>
+          </a:xfrm>
+          <a:prstGeom prst="rect">
+            <a:avLst/>
+          </a:prstGeom>
+          <a:noFill/>
+        </p:spPr>
+        <p:txBody>
+          <a:bodyPr wrap="square">
+            <a:noAutofit/>
+          </a:bodyPr>
+          <a:lstStyle/>
+          <a:p>
+            <a:pPr>
+              <a:lnSpc>
+                <a:spcPts val="2200"/>
+              </a:lnSpc>
+              <a:defRPr sz="1200" b="0">
+                <a:solidFill>
+                  <a:srgbClr val="333333"/>
+                </a:solidFill>
+                <a:latin typeface="Calibri"/>
+              </a:defRPr>
+            </a:pPr>
+            <a:r>
+              <a:t>Module 5: UVM layers, agents, and checkers for this phase.</a:t>
+            </a:r>
+          </a:p>
+        </p:txBody>
+      </p:sp>
+      <p:sp>
+        <p:nvSpPr>
+          <p:cNvPr id="5" name="TextBox 4"/>
           <p:cNvSpPr txBox="1"/>
           <p:nvPr/>
         </p:nvSpPr>
@@ -4122,7 +4689,7 @@
               </a:defRPr>
             </a:pPr>
             <a:r>
-              <a:t>Module 5 self-check</a:t>
+              <a:t>1. Block hierarchy</a:t>
             </a:r>
           </a:p>
         </p:txBody>
@@ -4135,15 +4702,13 @@
         </p:nvSpPr>
         <p:spPr>
           <a:xfrm>
-            <a:off x="548640" y="1051560"/>
-            <a:ext cx="11064240" cy="914400"/>
+            <a:off x="548640" y="1234440"/>
+            <a:ext cx="11064240" cy="4937760"/>
           </a:xfrm>
           <a:prstGeom prst="rect">
             <a:avLst/>
           </a:prstGeom>
-          <a:solidFill>
-            <a:srgbClr val="F4F4F4"/>
-          </a:solidFill>
+          <a:noFill/>
         </p:spPr>
         <p:txBody>
           <a:bodyPr wrap="square">
@@ -4156,48 +4721,43 @@
                 <a:spcPts val="2200"/>
               </a:lnSpc>
               <a:spcAft>
-                <a:spcPts val="200"/>
+                <a:spcPts val="1000"/>
               </a:spcAft>
               <a:defRPr sz="2000" b="0">
                 <a:solidFill>
                   <a:srgbClr val="333333"/>
                 </a:solidFill>
-                <a:latin typeface="Consolas"/>
-              </a:defRPr>
-            </a:pPr>
-            <a:r>
-              <a:t>$ ./scripts/module5.sh --check</a:t>
-            </a:r>
-          </a:p>
-        </p:txBody>
-      </p:sp>
-      <p:pic>
-        <p:nvPicPr>
-          <p:cNvPr id="4" name="Picture 3" descr="module5_check.png"/>
-          <p:cNvPicPr>
-            <a:picLocks noChangeAspect="1"/>
-          </p:cNvPicPr>
-          <p:nvPr/>
-        </p:nvPicPr>
-        <p:blipFill>
-          <a:blip r:embed="rId2"/>
-          <a:stretch>
-            <a:fillRect/>
-          </a:stretch>
-        </p:blipFill>
-        <p:spPr>
-          <a:xfrm>
-            <a:off x="548640" y="1965960"/>
-            <a:ext cx="7071358" cy="3977639"/>
-          </a:xfrm>
-          <a:prstGeom prst="rect">
-            <a:avLst/>
-          </a:prstGeom>
-        </p:spPr>
-      </p:pic>
-      <p:sp>
-        <p:nvSpPr>
-          <p:cNvPr id="5" name="TextBox 4"/>
+                <a:latin typeface="Calibri"/>
+              </a:defRPr>
+            </a:pPr>
+            <a:r>
+              <a:t>• top_spi_baseline → `clk_div` + `spi_master`; C++</a:t>
+            </a:r>
+          </a:p>
+          <a:p>
+            <a:pPr>
+              <a:lnSpc>
+                <a:spcPts val="2200"/>
+              </a:lnSpc>
+              <a:spcAft>
+                <a:spcPts val="1000"/>
+              </a:spcAft>
+              <a:defRPr sz="2000" b="0">
+                <a:solidFill>
+                  <a:srgbClr val="333333"/>
+                </a:solidFill>
+                <a:latin typeface="Calibri"/>
+              </a:defRPr>
+            </a:pPr>
+            <a:r>
+              <a:t>      supplies `clk`/`rst_n`.</a:t>
+            </a:r>
+          </a:p>
+        </p:txBody>
+      </p:sp>
+      <p:sp>
+        <p:nvSpPr>
+          <p:cNvPr id="4" name="TextBox 3"/>
           <p:cNvSpPr txBox="1"/>
           <p:nvPr/>
         </p:nvSpPr>
@@ -4286,7 +4846,7 @@
               </a:defRPr>
             </a:pPr>
             <a:r>
-              <a:t>Example 1: SPI baseline</a:t>
+              <a:t>2. SPI master RTL</a:t>
             </a:r>
           </a:p>
         </p:txBody>
@@ -4328,7 +4888,7 @@
               </a:defRPr>
             </a:pPr>
             <a:r>
-              <a:t>• `dut/`: `spi_master.v`, `clk_div.v`</a:t>
+              <a:t>• clk_div: `clk_div_tick` every `DIVIDER` clocks.</a:t>
             </a:r>
           </a:p>
           <a:p>
@@ -4347,7 +4907,7 @@
               </a:defRPr>
             </a:pPr>
             <a:r>
-              <a:t>• `top_spi_baseline.sv`: Top with clk_div, spi_master;</a:t>
+              <a:t>• spi_master: Mode 0; `cs_n` frames; MSB-first on</a:t>
             </a:r>
           </a:p>
           <a:p>
@@ -4366,7 +4926,7 @@
               </a:defRPr>
             </a:pPr>
             <a:r>
-              <a:t>      directed stimulus and checks in initial blocks.</a:t>
+              <a:t>      `mosi`; `done` when complete.</a:t>
             </a:r>
           </a:p>
           <a:p>
@@ -4385,7 +4945,7 @@
               </a:defRPr>
             </a:pPr>
             <a:r>
-              <a:t>• `sim_main.cpp`: C++ harness (clock, reset);</a:t>
+              <a:t>• Outputs: `sclk` (idle low), `mosi`, `cs_n` — no</a:t>
             </a:r>
           </a:p>
           <a:p>
@@ -4404,7 +4964,7 @@
               </a:defRPr>
             </a:pPr>
             <a:r>
-              <a:t>      simulation runs until `$finish`.</a:t>
+              <a:t>      `miso` in baseline.</a:t>
             </a:r>
           </a:p>
         </p:txBody>
@@ -4500,7 +5060,7 @@
               </a:defRPr>
             </a:pPr>
             <a:r>
-              <a:t>Demo: SPI baseline</a:t>
+              <a:t>3. Mode 0 timing on the wire</a:t>
             </a:r>
           </a:p>
         </p:txBody>
@@ -4513,15 +5073,13 @@
         </p:nvSpPr>
         <p:spPr>
           <a:xfrm>
-            <a:off x="548640" y="1051560"/>
-            <a:ext cx="11064240" cy="914400"/>
+            <a:off x="548640" y="1234440"/>
+            <a:ext cx="11064240" cy="4937760"/>
           </a:xfrm>
           <a:prstGeom prst="rect">
             <a:avLst/>
           </a:prstGeom>
-          <a:solidFill>
-            <a:srgbClr val="F4F4F4"/>
-          </a:solidFill>
+          <a:noFill/>
         </p:spPr>
         <p:txBody>
           <a:bodyPr wrap="square">
@@ -4534,48 +5092,43 @@
                 <a:spcPts val="2200"/>
               </a:lnSpc>
               <a:spcAft>
-                <a:spcPts val="200"/>
+                <a:spcPts val="1000"/>
               </a:spcAft>
               <a:defRPr sz="2000" b="0">
                 <a:solidFill>
                   <a:srgbClr val="333333"/>
                 </a:solidFill>
-                <a:latin typeface="Consolas"/>
-              </a:defRPr>
-            </a:pPr>
-            <a:r>
-              <a:t>$ ./scripts/module5.sh --run</a:t>
-            </a:r>
-          </a:p>
-        </p:txBody>
-      </p:sp>
-      <p:pic>
-        <p:nvPicPr>
-          <p:cNvPr id="4" name="Picture 3" descr="ex01_spi_baseline.png"/>
-          <p:cNvPicPr>
-            <a:picLocks noChangeAspect="1"/>
-          </p:cNvPicPr>
-          <p:nvPr/>
-        </p:nvPicPr>
-        <p:blipFill>
-          <a:blip r:embed="rId2"/>
-          <a:stretch>
-            <a:fillRect/>
-          </a:stretch>
-        </p:blipFill>
-        <p:spPr>
-          <a:xfrm>
-            <a:off x="548640" y="1965960"/>
-            <a:ext cx="7071358" cy="3977639"/>
-          </a:xfrm>
-          <a:prstGeom prst="rect">
-            <a:avLst/>
-          </a:prstGeom>
-        </p:spPr>
-      </p:pic>
-      <p:sp>
-        <p:nvSpPr>
-          <p:cNvPr id="5" name="TextBox 4"/>
+                <a:latin typeface="Calibri"/>
+              </a:defRPr>
+            </a:pPr>
+            <a:r>
+              <a:t>• Capture on rising SCLK; change MOSI on falling SCLK;</a:t>
+            </a:r>
+          </a:p>
+          <a:p>
+            <a:pPr>
+              <a:lnSpc>
+                <a:spcPts val="2200"/>
+              </a:lnSpc>
+              <a:spcAft>
+                <a:spcPts val="1000"/>
+              </a:spcAft>
+              <a:defRPr sz="2000" b="0">
+                <a:solidFill>
+                  <a:srgbClr val="333333"/>
+                </a:solidFill>
+                <a:latin typeface="Calibri"/>
+              </a:defRPr>
+            </a:pPr>
+            <a:r>
+              <a:t>      8 edges per byte.</a:t>
+            </a:r>
+          </a:p>
+        </p:txBody>
+      </p:sp>
+      <p:sp>
+        <p:nvSpPr>
+          <p:cNvPr id="4" name="TextBox 3"/>
           <p:cNvSpPr txBox="1"/>
           <p:nvPr/>
         </p:nvSpPr>
@@ -4664,7 +5217,7 @@
               </a:defRPr>
             </a:pPr>
             <a:r>
-              <a:t>Practice &amp; assessment</a:t>
+              <a:t>Verification &amp; testing methods</a:t>
             </a:r>
           </a:p>
         </p:txBody>
@@ -4760,21 +5313,45 @@
               </a:defRPr>
             </a:pPr>
             <a:r>
-              <a:t>Exercises</a:t>
-            </a:r>
-          </a:p>
-        </p:txBody>
-      </p:sp>
-      <p:sp>
-        <p:nvSpPr>
-          <p:cNvPr id="3" name="TextBox 2"/>
+              <a:t>Testing and closure flow</a:t>
+            </a:r>
+          </a:p>
+        </p:txBody>
+      </p:sp>
+      <p:pic>
+        <p:nvPicPr>
+          <p:cNvPr id="3" name="Picture 2" descr="testing_methods.png"/>
+          <p:cNvPicPr>
+            <a:picLocks noChangeAspect="1"/>
+          </p:cNvPicPr>
+          <p:nvPr/>
+        </p:nvPicPr>
+        <p:blipFill>
+          <a:blip r:embed="rId2"/>
+          <a:stretch>
+            <a:fillRect/>
+          </a:stretch>
+        </p:blipFill>
+        <p:spPr>
+          <a:xfrm>
+            <a:off x="548640" y="1143000"/>
+            <a:ext cx="8128000" cy="4572000"/>
+          </a:xfrm>
+          <a:prstGeom prst="rect">
+            <a:avLst/>
+          </a:prstGeom>
+        </p:spPr>
+      </p:pic>
+      <p:sp>
+        <p:nvSpPr>
+          <p:cNvPr id="4" name="TextBox 3"/>
           <p:cNvSpPr txBox="1"/>
           <p:nvPr/>
         </p:nvSpPr>
         <p:spPr>
           <a:xfrm>
-            <a:off x="548640" y="1234440"/>
-            <a:ext cx="11064240" cy="4937760"/>
+            <a:off x="548640" y="5897880"/>
+            <a:ext cx="11064240" cy="411480"/>
           </a:xfrm>
           <a:prstGeom prst="rect">
             <a:avLst/>
@@ -4791,10 +5368,7 @@
               <a:lnSpc>
                 <a:spcPts val="2200"/>
               </a:lnSpc>
-              <a:spcAft>
-                <a:spcPts val="1000"/>
-              </a:spcAft>
-              <a:defRPr sz="2000" b="0">
+              <a:defRPr sz="1200" b="0">
                 <a:solidFill>
                   <a:srgbClr val="333333"/>
                 </a:solidFill>
@@ -4802,71 +5376,14 @@
               </a:defRPr>
             </a:pPr>
             <a:r>
-              <a:t>• Run spi_baseline</a:t>
-            </a:r>
-          </a:p>
-          <a:p>
-            <a:pPr>
-              <a:lnSpc>
-                <a:spcPts val="2200"/>
-              </a:lnSpc>
-              <a:spcAft>
-                <a:spcPts val="1000"/>
-              </a:spcAft>
-              <a:defRPr sz="2000" b="0">
-                <a:solidFill>
-                  <a:srgbClr val="333333"/>
-                </a:solidFill>
-                <a:latin typeface="Calibri"/>
-              </a:defRPr>
-            </a:pPr>
-            <a:r>
-              <a:t>• Trace one transfer</a:t>
-            </a:r>
-          </a:p>
-          <a:p>
-            <a:pPr>
-              <a:lnSpc>
-                <a:spcPts val="2200"/>
-              </a:lnSpc>
-              <a:spcAft>
-                <a:spcPts val="1000"/>
-              </a:spcAft>
-              <a:defRPr sz="2000" b="0">
-                <a:solidFill>
-                  <a:srgbClr val="333333"/>
-                </a:solidFill>
-                <a:latin typeface="Calibri"/>
-              </a:defRPr>
-            </a:pPr>
-            <a:r>
-              <a:t>• Mode 0 timing</a:t>
-            </a:r>
-          </a:p>
-          <a:p>
-            <a:pPr>
-              <a:lnSpc>
-                <a:spcPts val="2200"/>
-              </a:lnSpc>
-              <a:spcAft>
-                <a:spcPts val="1000"/>
-              </a:spcAft>
-              <a:defRPr sz="2000" b="0">
-                <a:solidFill>
-                  <a:srgbClr val="333333"/>
-                </a:solidFill>
-                <a:latin typeface="Calibri"/>
-              </a:defRPr>
-            </a:pPr>
-            <a:r>
-              <a:t>• Optional: Waveforms</a:t>
-            </a:r>
-          </a:p>
-        </p:txBody>
-      </p:sp>
-      <p:sp>
-        <p:nvSpPr>
-          <p:cNvPr id="4" name="TextBox 3"/>
+              <a:t>Module 5: how tests, checks, and metrics close verification goals.</a:t>
+            </a:r>
+          </a:p>
+        </p:txBody>
+      </p:sp>
+      <p:sp>
+        <p:nvSpPr>
+          <p:cNvPr id="5" name="TextBox 4"/>
           <p:cNvSpPr txBox="1"/>
           <p:nvPr/>
         </p:nvSpPr>
@@ -4955,7 +5472,7 @@
               </a:defRPr>
             </a:pPr>
             <a:r>
-              <a:t>Assessment checklist</a:t>
+              <a:t>1. Baseline goals</a:t>
             </a:r>
           </a:p>
         </p:txBody>
@@ -4997,7 +5514,7 @@
               </a:defRPr>
             </a:pPr>
             <a:r>
-              <a:t>• Can describe SPI mode 0 (idle low, capture on</a:t>
+              <a:t>• Confirm Mode 0 serialization before SPI UVM (Module</a:t>
             </a:r>
           </a:p>
           <a:p>
@@ -5016,121 +5533,7 @@
               </a:defRPr>
             </a:pPr>
             <a:r>
-              <a:t>      rising, change on falling) and signals sclk, mosi,</a:t>
-            </a:r>
-          </a:p>
-          <a:p>
-            <a:pPr>
-              <a:lnSpc>
-                <a:spcPts val="2200"/>
-              </a:lnSpc>
-              <a:spcAft>
-                <a:spcPts val="1000"/>
-              </a:spcAft>
-              <a:defRPr sz="2000" b="0">
-                <a:solidFill>
-                  <a:srgbClr val="333333"/>
-                </a:solidFill>
-                <a:latin typeface="Calibri"/>
-              </a:defRPr>
-            </a:pPr>
-            <a:r>
-              <a:t>      cs…</a:t>
-            </a:r>
-          </a:p>
-          <a:p>
-            <a:pPr>
-              <a:lnSpc>
-                <a:spcPts val="2200"/>
-              </a:lnSpc>
-              <a:spcAft>
-                <a:spcPts val="1000"/>
-              </a:spcAft>
-              <a:defRPr sz="2000" b="0">
-                <a:solidFill>
-                  <a:srgbClr val="333333"/>
-                </a:solidFill>
-                <a:latin typeface="Calibri"/>
-              </a:defRPr>
-            </a:pPr>
-            <a:r>
-              <a:t>• Can explain the role of spi_master and clk_div in</a:t>
-            </a:r>
-          </a:p>
-          <a:p>
-            <a:pPr>
-              <a:lnSpc>
-                <a:spcPts val="2200"/>
-              </a:lnSpc>
-              <a:spcAft>
-                <a:spcPts val="1000"/>
-              </a:spcAft>
-              <a:defRPr sz="2000" b="0">
-                <a:solidFill>
-                  <a:srgbClr val="333333"/>
-                </a:solidFill>
-                <a:latin typeface="Calibri"/>
-              </a:defRPr>
-            </a:pPr>
-            <a:r>
-              <a:t>      the RTL.</a:t>
-            </a:r>
-          </a:p>
-          <a:p>
-            <a:pPr>
-              <a:lnSpc>
-                <a:spcPts val="2200"/>
-              </a:lnSpc>
-              <a:spcAft>
-                <a:spcPts val="1000"/>
-              </a:spcAft>
-              <a:defRPr sz="2000" b="0">
-                <a:solidFill>
-                  <a:srgbClr val="333333"/>
-                </a:solidFill>
-                <a:latin typeface="Calibri"/>
-              </a:defRPr>
-            </a:pPr>
-            <a:r>
-              <a:t>• Can run spi_baseline and interpret the directed test</a:t>
-            </a:r>
-          </a:p>
-          <a:p>
-            <a:pPr>
-              <a:lnSpc>
-                <a:spcPts val="2200"/>
-              </a:lnSpc>
-              <a:spcAft>
-                <a:spcPts val="1000"/>
-              </a:spcAft>
-              <a:defRPr sz="2000" b="0">
-                <a:solidFill>
-                  <a:srgbClr val="333333"/>
-                </a:solidFill>
-                <a:latin typeface="Calibri"/>
-              </a:defRPr>
-            </a:pPr>
-            <a:r>
-              <a:t>      result.</a:t>
-            </a:r>
-          </a:p>
-          <a:p>
-            <a:pPr>
-              <a:lnSpc>
-                <a:spcPts val="2200"/>
-              </a:lnSpc>
-              <a:spcAft>
-                <a:spcPts val="1000"/>
-              </a:spcAft>
-              <a:defRPr sz="2000" b="0">
-                <a:solidFill>
-                  <a:srgbClr val="333333"/>
-                </a:solidFill>
-                <a:latin typeface="Calibri"/>
-              </a:defRPr>
-            </a:pPr>
-            <a:r>
-              <a:t>• Ready for Module 6: SPI UVM+SV verification.</a:t>
+              <a:t>      6).</a:t>
             </a:r>
           </a:p>
         </p:txBody>
@@ -5226,7 +5629,7 @@
               </a:defRPr>
             </a:pPr>
             <a:r>
-              <a:t>Summary &amp; next steps</a:t>
+              <a:t>2. Directed test flow</a:t>
             </a:r>
           </a:p>
         </p:txBody>
@@ -5268,7 +5671,7 @@
               </a:defRPr>
             </a:pPr>
             <a:r>
-              <a:t>• Understand the SPI protocol (mode 0, signals),</a:t>
+              <a:t>• Pulse `start` + `data_in` (0x55, 0xAA);</a:t>
             </a:r>
           </a:p>
           <a:p>
@@ -5287,9 +5690,128 @@
               </a:defRPr>
             </a:pPr>
             <a:r>
-              <a:t>      translate it to RTL (SPI master, clk_div), and</a:t>
-            </a:r>
-          </a:p>
+              <a:t>      `wait(done)`; read `[PASS]` messages.</a:t>
+            </a:r>
+          </a:p>
+        </p:txBody>
+      </p:sp>
+      <p:sp>
+        <p:nvSpPr>
+          <p:cNvPr id="4" name="TextBox 3"/>
+          <p:cNvSpPr txBox="1"/>
+          <p:nvPr/>
+        </p:nvSpPr>
+        <p:spPr>
+          <a:xfrm>
+            <a:off x="548640" y="6355080"/>
+            <a:ext cx="11064240" cy="320040"/>
+          </a:xfrm>
+          <a:prstGeom prst="rect">
+            <a:avLst/>
+          </a:prstGeom>
+          <a:noFill/>
+        </p:spPr>
+        <p:txBody>
+          <a:bodyPr wrap="square">
+            <a:noAutofit/>
+          </a:bodyPr>
+          <a:lstStyle/>
+          <a:p>
+            <a:pPr algn="r">
+              <a:lnSpc>
+                <a:spcPts val="2200"/>
+              </a:lnSpc>
+              <a:defRPr sz="1000" b="0">
+                <a:solidFill>
+                  <a:srgbClr val="666666"/>
+                </a:solidFill>
+                <a:latin typeface="Calibri"/>
+              </a:defRPr>
+            </a:pPr>
+            <a:r>
+              <a:t>learn_uart_spi_i2c / Module 5</a:t>
+            </a:r>
+          </a:p>
+        </p:txBody>
+      </p:sp>
+    </p:spTree>
+  </p:cSld>
+  <p:clrMapOvr>
+    <a:masterClrMapping/>
+  </p:clrMapOvr>
+</p:sld>
+</file>
+
+<file path=ppt/slides/slide18.xml><?xml version="1.0" encoding="utf-8"?>
+<p:sld xmlns:a="http://schemas.openxmlformats.org/drawingml/2006/main" xmlns:p="http://schemas.openxmlformats.org/presentationml/2006/main" xmlns:r="http://schemas.openxmlformats.org/officeDocument/2006/relationships">
+  <p:cSld>
+    <p:spTree>
+      <p:nvGrpSpPr>
+        <p:cNvPr id="1" name=""/>
+        <p:cNvGrpSpPr/>
+        <p:nvPr/>
+      </p:nvGrpSpPr>
+      <p:grpSpPr/>
+      <p:sp>
+        <p:nvSpPr>
+          <p:cNvPr id="2" name="TextBox 1"/>
+          <p:cNvSpPr txBox="1"/>
+          <p:nvPr/>
+        </p:nvSpPr>
+        <p:spPr>
+          <a:xfrm>
+            <a:off x="548640" y="411480"/>
+            <a:ext cx="11064240" cy="777240"/>
+          </a:xfrm>
+          <a:prstGeom prst="rect">
+            <a:avLst/>
+          </a:prstGeom>
+          <a:noFill/>
+        </p:spPr>
+        <p:txBody>
+          <a:bodyPr wrap="square">
+            <a:noAutofit/>
+          </a:bodyPr>
+          <a:lstStyle/>
+          <a:p>
+            <a:pPr>
+              <a:lnSpc>
+                <a:spcPts val="2200"/>
+              </a:lnSpc>
+              <a:defRPr sz="2800" b="1">
+                <a:solidFill>
+                  <a:srgbClr val="1A1A2E"/>
+                </a:solidFill>
+                <a:latin typeface="Calibri"/>
+              </a:defRPr>
+            </a:pPr>
+            <a:r>
+              <a:t>3. Waveform learning (optional)</a:t>
+            </a:r>
+          </a:p>
+        </p:txBody>
+      </p:sp>
+      <p:sp>
+        <p:nvSpPr>
+          <p:cNvPr id="3" name="TextBox 2"/>
+          <p:cNvSpPr txBox="1"/>
+          <p:nvPr/>
+        </p:nvSpPr>
+        <p:spPr>
+          <a:xfrm>
+            <a:off x="548640" y="1234440"/>
+            <a:ext cx="11064240" cy="4937760"/>
+          </a:xfrm>
+          <a:prstGeom prst="rect">
+            <a:avLst/>
+          </a:prstGeom>
+          <a:noFill/>
+        </p:spPr>
+        <p:txBody>
+          <a:bodyPr wrap="square">
+            <a:noAutofit/>
+          </a:bodyPr>
+          <a:lstStyle/>
           <a:p>
             <a:pPr>
               <a:lnSpc>
@@ -5306,7 +5828,7 @@
               </a:defRPr>
             </a:pPr>
             <a:r>
-              <a:t>      verif…</a:t>
+              <a:t>• Count 8 SCLK cycles per frame; verify MSB-first bit</a:t>
             </a:r>
           </a:p>
           <a:p>
@@ -5325,7 +5847,7 @@
               </a:defRPr>
             </a:pPr>
             <a:r>
-              <a:t>• Complete module5/CHECKLIST.md</a:t>
+              <a:t>      order on MOSI.</a:t>
             </a:r>
           </a:p>
           <a:p>
@@ -5344,7 +5866,7 @@
               </a:defRPr>
             </a:pPr>
             <a:r>
-              <a:t>• Run ./scripts/module5.sh --check</a:t>
+              <a:t>• Defer MISO, multi-slave CS, and random data to</a:t>
             </a:r>
           </a:p>
           <a:p>
@@ -5363,7 +5885,7 @@
               </a:defRPr>
             </a:pPr>
             <a:r>
-              <a:t>• Next: SPI UVM+SV</a:t>
+              <a:t>      Module 6.</a:t>
             </a:r>
           </a:p>
         </p:txBody>
@@ -5371,6 +5893,102 @@
       <p:sp>
         <p:nvSpPr>
           <p:cNvPr id="4" name="TextBox 3"/>
+          <p:cNvSpPr txBox="1"/>
+          <p:nvPr/>
+        </p:nvSpPr>
+        <p:spPr>
+          <a:xfrm>
+            <a:off x="548640" y="6355080"/>
+            <a:ext cx="11064240" cy="320040"/>
+          </a:xfrm>
+          <a:prstGeom prst="rect">
+            <a:avLst/>
+          </a:prstGeom>
+          <a:noFill/>
+        </p:spPr>
+        <p:txBody>
+          <a:bodyPr wrap="square">
+            <a:noAutofit/>
+          </a:bodyPr>
+          <a:lstStyle/>
+          <a:p>
+            <a:pPr algn="r">
+              <a:lnSpc>
+                <a:spcPts val="2200"/>
+              </a:lnSpc>
+              <a:defRPr sz="1000" b="0">
+                <a:solidFill>
+                  <a:srgbClr val="666666"/>
+                </a:solidFill>
+                <a:latin typeface="Calibri"/>
+              </a:defRPr>
+            </a:pPr>
+            <a:r>
+              <a:t>learn_uart_spi_i2c / Module 5</a:t>
+            </a:r>
+          </a:p>
+        </p:txBody>
+      </p:sp>
+    </p:spTree>
+  </p:cSld>
+  <p:clrMapOvr>
+    <a:masterClrMapping/>
+  </p:clrMapOvr>
+</p:sld>
+</file>
+
+<file path=ppt/slides/slide19.xml><?xml version="1.0" encoding="utf-8"?>
+<p:sld xmlns:a="http://schemas.openxmlformats.org/drawingml/2006/main" xmlns:p="http://schemas.openxmlformats.org/presentationml/2006/main" xmlns:r="http://schemas.openxmlformats.org/officeDocument/2006/relationships">
+  <p:cSld>
+    <p:spTree>
+      <p:nvGrpSpPr>
+        <p:cNvPr id="1" name=""/>
+        <p:cNvGrpSpPr/>
+        <p:nvPr/>
+      </p:nvGrpSpPr>
+      <p:grpSpPr/>
+      <p:sp>
+        <p:nvSpPr>
+          <p:cNvPr id="2" name="TextBox 1"/>
+          <p:cNvSpPr txBox="1"/>
+          <p:nvPr/>
+        </p:nvSpPr>
+        <p:spPr>
+          <a:xfrm>
+            <a:off x="548640" y="2743200"/>
+            <a:ext cx="11064240" cy="1371600"/>
+          </a:xfrm>
+          <a:prstGeom prst="rect">
+            <a:avLst/>
+          </a:prstGeom>
+          <a:noFill/>
+        </p:spPr>
+        <p:txBody>
+          <a:bodyPr wrap="square">
+            <a:noAutofit/>
+          </a:bodyPr>
+          <a:lstStyle/>
+          <a:p>
+            <a:pPr algn="ctr">
+              <a:lnSpc>
+                <a:spcPts val="2200"/>
+              </a:lnSpc>
+              <a:defRPr sz="3600" b="1">
+                <a:solidFill>
+                  <a:srgbClr val="1A1A2E"/>
+                </a:solidFill>
+                <a:latin typeface="Calibri"/>
+              </a:defRPr>
+            </a:pPr>
+            <a:r>
+              <a:t>Syllabus topics</a:t>
+            </a:r>
+          </a:p>
+        </p:txBody>
+      </p:sp>
+      <p:sp>
+        <p:nvSpPr>
+          <p:cNvPr id="3" name="TextBox 2"/>
           <p:cNvSpPr txBox="1"/>
           <p:nvPr/>
         </p:nvSpPr>
@@ -5539,7 +6157,7 @@
               </a:defRPr>
             </a:pPr>
             <a:r>
-              <a:t>• Signals: sclk, mosi, cs_n; clk_div_tick for timing</a:t>
+              <a:t>• RTL block architecture: `clk_div` + `spi_master`</a:t>
             </a:r>
           </a:p>
           <a:p>
@@ -5558,7 +6176,7 @@
               </a:defRPr>
             </a:pPr>
             <a:r>
-              <a:t>      (no MISO in this baseline).</a:t>
+              <a:t>      hierarchy, FSM, and Mode 0 timing on the wire.</a:t>
             </a:r>
           </a:p>
           <a:p>
@@ -5577,7 +6195,7 @@
               </a:defRPr>
             </a:pPr>
             <a:r>
-              <a:t>• RTL architecture: spi_master (start, data_in → sclk,</a:t>
+              <a:t>• Baseline verification: Directed stimulus,</a:t>
             </a:r>
           </a:p>
           <a:p>
@@ -5596,7 +6214,7 @@
               </a:defRPr>
             </a:pPr>
             <a:r>
-              <a:t>      mosi, cs_n, done); clk_div (divider → clk_div_…</a:t>
+              <a:t>      `done`-based checks, and optional waveform review (8</a:t>
             </a:r>
           </a:p>
           <a:p>
@@ -5615,7 +6233,7 @@
               </a:defRPr>
             </a:pPr>
             <a:r>
-              <a:t>• Basic TB: Directed transfers (e.g. 0x55, 0xAA); wait</a:t>
+              <a:t>      SCLK…</a:t>
             </a:r>
           </a:p>
           <a:p>
@@ -5634,7 +6252,1775 @@
               </a:defRPr>
             </a:pPr>
             <a:r>
-              <a:t>      for done; no UVM.</a:t>
+              <a:t>• Path to Module 6: Same DUT, UVM agent with bus</a:t>
+            </a:r>
+          </a:p>
+          <a:p>
+            <a:pPr>
+              <a:lnSpc>
+                <a:spcPts val="2200"/>
+              </a:lnSpc>
+              <a:spcAft>
+                <a:spcPts val="1000"/>
+              </a:spcAft>
+              <a:defRPr sz="2000" b="0">
+                <a:solidFill>
+                  <a:srgbClr val="333333"/>
+                </a:solidFill>
+                <a:latin typeface="Calibri"/>
+              </a:defRPr>
+            </a:pPr>
+            <a:r>
+              <a:t>      monitor on SCLK/MOSI/CS_N.</a:t>
+            </a:r>
+          </a:p>
+        </p:txBody>
+      </p:sp>
+      <p:sp>
+        <p:nvSpPr>
+          <p:cNvPr id="4" name="TextBox 3"/>
+          <p:cNvSpPr txBox="1"/>
+          <p:nvPr/>
+        </p:nvSpPr>
+        <p:spPr>
+          <a:xfrm>
+            <a:off x="548640" y="6355080"/>
+            <a:ext cx="11064240" cy="320040"/>
+          </a:xfrm>
+          <a:prstGeom prst="rect">
+            <a:avLst/>
+          </a:prstGeom>
+          <a:noFill/>
+        </p:spPr>
+        <p:txBody>
+          <a:bodyPr wrap="square">
+            <a:noAutofit/>
+          </a:bodyPr>
+          <a:lstStyle/>
+          <a:p>
+            <a:pPr algn="r">
+              <a:lnSpc>
+                <a:spcPts val="2200"/>
+              </a:lnSpc>
+              <a:defRPr sz="1000" b="0">
+                <a:solidFill>
+                  <a:srgbClr val="666666"/>
+                </a:solidFill>
+                <a:latin typeface="Calibri"/>
+              </a:defRPr>
+            </a:pPr>
+            <a:r>
+              <a:t>learn_uart_spi_i2c / Module 5</a:t>
+            </a:r>
+          </a:p>
+        </p:txBody>
+      </p:sp>
+    </p:spTree>
+  </p:cSld>
+  <p:clrMapOvr>
+    <a:masterClrMapping/>
+  </p:clrMapOvr>
+</p:sld>
+</file>
+
+<file path=ppt/slides/slide20.xml><?xml version="1.0" encoding="utf-8"?>
+<p:sld xmlns:a="http://schemas.openxmlformats.org/drawingml/2006/main" xmlns:p="http://schemas.openxmlformats.org/presentationml/2006/main" xmlns:r="http://schemas.openxmlformats.org/officeDocument/2006/relationships">
+  <p:cSld>
+    <p:spTree>
+      <p:nvGrpSpPr>
+        <p:cNvPr id="1" name=""/>
+        <p:cNvGrpSpPr/>
+        <p:nvPr/>
+      </p:nvGrpSpPr>
+      <p:grpSpPr/>
+      <p:sp>
+        <p:nvSpPr>
+          <p:cNvPr id="2" name="TextBox 1"/>
+          <p:cNvSpPr txBox="1"/>
+          <p:nvPr/>
+        </p:nvSpPr>
+        <p:spPr>
+          <a:xfrm>
+            <a:off x="548640" y="411480"/>
+            <a:ext cx="11064240" cy="777240"/>
+          </a:xfrm>
+          <a:prstGeom prst="rect">
+            <a:avLst/>
+          </a:prstGeom>
+          <a:noFill/>
+        </p:spPr>
+        <p:txBody>
+          <a:bodyPr wrap="square">
+            <a:noAutofit/>
+          </a:bodyPr>
+          <a:lstStyle/>
+          <a:p>
+            <a:pPr>
+              <a:lnSpc>
+                <a:spcPts val="2200"/>
+              </a:lnSpc>
+              <a:defRPr sz="2800" b="1">
+                <a:solidFill>
+                  <a:srgbClr val="1A1A2E"/>
+                </a:solidFill>
+                <a:latin typeface="Calibri"/>
+              </a:defRPr>
+            </a:pPr>
+            <a:r>
+              <a:t>1. SPI Protocol (Mode 0)</a:t>
+            </a:r>
+          </a:p>
+        </p:txBody>
+      </p:sp>
+      <p:sp>
+        <p:nvSpPr>
+          <p:cNvPr id="3" name="TextBox 2"/>
+          <p:cNvSpPr txBox="1"/>
+          <p:nvPr/>
+        </p:nvSpPr>
+        <p:spPr>
+          <a:xfrm>
+            <a:off x="548640" y="1234440"/>
+            <a:ext cx="11064240" cy="4937760"/>
+          </a:xfrm>
+          <a:prstGeom prst="rect">
+            <a:avLst/>
+          </a:prstGeom>
+          <a:noFill/>
+        </p:spPr>
+        <p:txBody>
+          <a:bodyPr wrap="square">
+            <a:noAutofit/>
+          </a:bodyPr>
+          <a:lstStyle/>
+          <a:p>
+            <a:pPr>
+              <a:lnSpc>
+                <a:spcPts val="2200"/>
+              </a:lnSpc>
+              <a:spcAft>
+                <a:spcPts val="1000"/>
+              </a:spcAft>
+              <a:defRPr sz="2000" b="0">
+                <a:solidFill>
+                  <a:srgbClr val="333333"/>
+                </a:solidFill>
+                <a:latin typeface="Calibri"/>
+              </a:defRPr>
+            </a:pPr>
+            <a:r>
+              <a:t>• Signals: sclk (serial clock), mosi (master out,</a:t>
+            </a:r>
+          </a:p>
+          <a:p>
+            <a:pPr>
+              <a:lnSpc>
+                <a:spcPts val="2200"/>
+              </a:lnSpc>
+              <a:spcAft>
+                <a:spcPts val="1000"/>
+              </a:spcAft>
+              <a:defRPr sz="2000" b="0">
+                <a:solidFill>
+                  <a:srgbClr val="333333"/>
+                </a:solidFill>
+                <a:latin typeface="Calibri"/>
+              </a:defRPr>
+            </a:pPr>
+            <a:r>
+              <a:t>      slave in), cs_n (active-low chip select). Optional:…</a:t>
+            </a:r>
+          </a:p>
+          <a:p>
+            <a:pPr>
+              <a:lnSpc>
+                <a:spcPts val="2200"/>
+              </a:lnSpc>
+              <a:spcAft>
+                <a:spcPts val="1000"/>
+              </a:spcAft>
+              <a:defRPr sz="2000" b="0">
+                <a:solidFill>
+                  <a:srgbClr val="333333"/>
+                </a:solidFill>
+                <a:latin typeface="Calibri"/>
+              </a:defRPr>
+            </a:pPr>
+            <a:r>
+              <a:t>• Mode 0 (CPOL=0, CPHA=0): SCLK idles low; data</a:t>
+            </a:r>
+          </a:p>
+          <a:p>
+            <a:pPr>
+              <a:lnSpc>
+                <a:spcPts val="2200"/>
+              </a:lnSpc>
+              <a:spcAft>
+                <a:spcPts val="1000"/>
+              </a:spcAft>
+              <a:defRPr sz="2000" b="0">
+                <a:solidFill>
+                  <a:srgbClr val="333333"/>
+                </a:solidFill>
+                <a:latin typeface="Calibri"/>
+              </a:defRPr>
+            </a:pPr>
+            <a:r>
+              <a:t>      captured on rising edge; data changed on falling</a:t>
+            </a:r>
+          </a:p>
+          <a:p>
+            <a:pPr>
+              <a:lnSpc>
+                <a:spcPts val="2200"/>
+              </a:lnSpc>
+              <a:spcAft>
+                <a:spcPts val="1000"/>
+              </a:spcAft>
+              <a:defRPr sz="2000" b="0">
+                <a:solidFill>
+                  <a:srgbClr val="333333"/>
+                </a:solidFill>
+                <a:latin typeface="Calibri"/>
+              </a:defRPr>
+            </a:pPr>
+            <a:r>
+              <a:t>      edge.</a:t>
+            </a:r>
+          </a:p>
+          <a:p>
+            <a:pPr>
+              <a:lnSpc>
+                <a:spcPts val="2200"/>
+              </a:lnSpc>
+              <a:spcAft>
+                <a:spcPts val="1000"/>
+              </a:spcAft>
+              <a:defRPr sz="2000" b="0">
+                <a:solidFill>
+                  <a:srgbClr val="333333"/>
+                </a:solidFill>
+                <a:latin typeface="Calibri"/>
+              </a:defRPr>
+            </a:pPr>
+            <a:r>
+              <a:t>• Timing: One bit per clk_div_tick; clk_div_tick</a:t>
+            </a:r>
+          </a:p>
+          <a:p>
+            <a:pPr>
+              <a:lnSpc>
+                <a:spcPts val="2200"/>
+              </a:lnSpc>
+              <a:spcAft>
+                <a:spcPts val="1000"/>
+              </a:spcAft>
+              <a:defRPr sz="2000" b="0">
+                <a:solidFill>
+                  <a:srgbClr val="333333"/>
+                </a:solidFill>
+                <a:latin typeface="Calibri"/>
+              </a:defRPr>
+            </a:pPr>
+            <a:r>
+              <a:t>      derived from system clock via divider (e.g.</a:t>
+            </a:r>
+          </a:p>
+          <a:p>
+            <a:pPr>
+              <a:lnSpc>
+                <a:spcPts val="2200"/>
+              </a:lnSpc>
+              <a:spcAft>
+                <a:spcPts val="1000"/>
+              </a:spcAft>
+              <a:defRPr sz="2000" b="0">
+                <a:solidFill>
+                  <a:srgbClr val="333333"/>
+                </a:solidFill>
+                <a:latin typeface="Calibri"/>
+              </a:defRPr>
+            </a:pPr>
+            <a:r>
+              <a:t>      DIVIDER=…</a:t>
+            </a:r>
+          </a:p>
+        </p:txBody>
+      </p:sp>
+      <p:sp>
+        <p:nvSpPr>
+          <p:cNvPr id="4" name="TextBox 3"/>
+          <p:cNvSpPr txBox="1"/>
+          <p:nvPr/>
+        </p:nvSpPr>
+        <p:spPr>
+          <a:xfrm>
+            <a:off x="548640" y="6355080"/>
+            <a:ext cx="11064240" cy="320040"/>
+          </a:xfrm>
+          <a:prstGeom prst="rect">
+            <a:avLst/>
+          </a:prstGeom>
+          <a:noFill/>
+        </p:spPr>
+        <p:txBody>
+          <a:bodyPr wrap="square">
+            <a:noAutofit/>
+          </a:bodyPr>
+          <a:lstStyle/>
+          <a:p>
+            <a:pPr algn="r">
+              <a:lnSpc>
+                <a:spcPts val="2200"/>
+              </a:lnSpc>
+              <a:defRPr sz="1000" b="0">
+                <a:solidFill>
+                  <a:srgbClr val="666666"/>
+                </a:solidFill>
+                <a:latin typeface="Calibri"/>
+              </a:defRPr>
+            </a:pPr>
+            <a:r>
+              <a:t>learn_uart_spi_i2c / Module 5</a:t>
+            </a:r>
+          </a:p>
+        </p:txBody>
+      </p:sp>
+    </p:spTree>
+  </p:cSld>
+  <p:clrMapOvr>
+    <a:masterClrMapping/>
+  </p:clrMapOvr>
+</p:sld>
+</file>
+
+<file path=ppt/slides/slide21.xml><?xml version="1.0" encoding="utf-8"?>
+<p:sld xmlns:a="http://schemas.openxmlformats.org/drawingml/2006/main" xmlns:p="http://schemas.openxmlformats.org/presentationml/2006/main" xmlns:r="http://schemas.openxmlformats.org/officeDocument/2006/relationships">
+  <p:cSld>
+    <p:spTree>
+      <p:nvGrpSpPr>
+        <p:cNvPr id="1" name=""/>
+        <p:cNvGrpSpPr/>
+        <p:nvPr/>
+      </p:nvGrpSpPr>
+      <p:grpSpPr/>
+      <p:sp>
+        <p:nvSpPr>
+          <p:cNvPr id="2" name="TextBox 1"/>
+          <p:cNvSpPr txBox="1"/>
+          <p:nvPr/>
+        </p:nvSpPr>
+        <p:spPr>
+          <a:xfrm>
+            <a:off x="548640" y="411480"/>
+            <a:ext cx="11064240" cy="777240"/>
+          </a:xfrm>
+          <a:prstGeom prst="rect">
+            <a:avLst/>
+          </a:prstGeom>
+          <a:noFill/>
+        </p:spPr>
+        <p:txBody>
+          <a:bodyPr wrap="square">
+            <a:noAutofit/>
+          </a:bodyPr>
+          <a:lstStyle/>
+          <a:p>
+            <a:pPr>
+              <a:lnSpc>
+                <a:spcPts val="2200"/>
+              </a:lnSpc>
+              <a:defRPr sz="2800" b="1">
+                <a:solidFill>
+                  <a:srgbClr val="1A1A2E"/>
+                </a:solidFill>
+                <a:latin typeface="Calibri"/>
+              </a:defRPr>
+            </a:pPr>
+            <a:r>
+              <a:t>2. Hands-on testbench (spi_baseline)</a:t>
+            </a:r>
+          </a:p>
+        </p:txBody>
+      </p:sp>
+      <p:sp>
+        <p:nvSpPr>
+          <p:cNvPr id="3" name="TextBox 2"/>
+          <p:cNvSpPr txBox="1"/>
+          <p:nvPr/>
+        </p:nvSpPr>
+        <p:spPr>
+          <a:xfrm>
+            <a:off x="548640" y="1234440"/>
+            <a:ext cx="11064240" cy="4937760"/>
+          </a:xfrm>
+          <a:prstGeom prst="rect">
+            <a:avLst/>
+          </a:prstGeom>
+          <a:noFill/>
+        </p:spPr>
+        <p:txBody>
+          <a:bodyPr wrap="square">
+            <a:noAutofit/>
+          </a:bodyPr>
+          <a:lstStyle/>
+          <a:p>
+            <a:pPr>
+              <a:lnSpc>
+                <a:spcPts val="2200"/>
+              </a:lnSpc>
+              <a:spcAft>
+                <a:spcPts val="1000"/>
+              </a:spcAft>
+              <a:defRPr sz="2000" b="0">
+                <a:solidFill>
+                  <a:srgbClr val="333333"/>
+                </a:solidFill>
+                <a:latin typeface="Calibri"/>
+              </a:defRPr>
+            </a:pPr>
+            <a:r>
+              <a:t>• Directed test in `top_spi_baseline.sv`: `start`,</a:t>
+            </a:r>
+          </a:p>
+          <a:p>
+            <a:pPr>
+              <a:lnSpc>
+                <a:spcPts val="2200"/>
+              </a:lnSpc>
+              <a:spcAft>
+                <a:spcPts val="1000"/>
+              </a:spcAft>
+              <a:defRPr sz="2000" b="0">
+                <a:solidFill>
+                  <a:srgbClr val="333333"/>
+                </a:solidFill>
+                <a:latin typeface="Calibri"/>
+              </a:defRPr>
+            </a:pPr>
+            <a:r>
+              <a:t>      `data_in`, `wait(done)`.</a:t>
+            </a:r>
+          </a:p>
+          <a:p>
+            <a:pPr>
+              <a:lnSpc>
+                <a:spcPts val="2200"/>
+              </a:lnSpc>
+              <a:spcAft>
+                <a:spcPts val="1000"/>
+              </a:spcAft>
+              <a:defRPr sz="2000" b="0">
+                <a:solidFill>
+                  <a:srgbClr val="333333"/>
+                </a:solidFill>
+                <a:latin typeface="Calibri"/>
+              </a:defRPr>
+            </a:pPr>
+            <a:r>
+              <a:t>• Pass: `[PASS]` lines and `SPI baseline test PASS`.</a:t>
+            </a:r>
+          </a:p>
+        </p:txBody>
+      </p:sp>
+      <p:sp>
+        <p:nvSpPr>
+          <p:cNvPr id="4" name="TextBox 3"/>
+          <p:cNvSpPr txBox="1"/>
+          <p:nvPr/>
+        </p:nvSpPr>
+        <p:spPr>
+          <a:xfrm>
+            <a:off x="548640" y="6355080"/>
+            <a:ext cx="11064240" cy="320040"/>
+          </a:xfrm>
+          <a:prstGeom prst="rect">
+            <a:avLst/>
+          </a:prstGeom>
+          <a:noFill/>
+        </p:spPr>
+        <p:txBody>
+          <a:bodyPr wrap="square">
+            <a:noAutofit/>
+          </a:bodyPr>
+          <a:lstStyle/>
+          <a:p>
+            <a:pPr algn="r">
+              <a:lnSpc>
+                <a:spcPts val="2200"/>
+              </a:lnSpc>
+              <a:defRPr sz="1000" b="0">
+                <a:solidFill>
+                  <a:srgbClr val="666666"/>
+                </a:solidFill>
+                <a:latin typeface="Calibri"/>
+              </a:defRPr>
+            </a:pPr>
+            <a:r>
+              <a:t>learn_uart_spi_i2c / Module 5</a:t>
+            </a:r>
+          </a:p>
+        </p:txBody>
+      </p:sp>
+    </p:spTree>
+  </p:cSld>
+  <p:clrMapOvr>
+    <a:masterClrMapping/>
+  </p:clrMapOvr>
+</p:sld>
+</file>
+
+<file path=ppt/slides/slide22.xml><?xml version="1.0" encoding="utf-8"?>
+<p:sld xmlns:a="http://schemas.openxmlformats.org/drawingml/2006/main" xmlns:p="http://schemas.openxmlformats.org/presentationml/2006/main" xmlns:r="http://schemas.openxmlformats.org/officeDocument/2006/relationships">
+  <p:cSld>
+    <p:spTree>
+      <p:nvGrpSpPr>
+        <p:cNvPr id="1" name=""/>
+        <p:cNvGrpSpPr/>
+        <p:nvPr/>
+      </p:nvGrpSpPr>
+      <p:grpSpPr/>
+      <p:sp>
+        <p:nvSpPr>
+          <p:cNvPr id="2" name="TextBox 1"/>
+          <p:cNvSpPr txBox="1"/>
+          <p:nvPr/>
+        </p:nvSpPr>
+        <p:spPr>
+          <a:xfrm>
+            <a:off x="548640" y="2743200"/>
+            <a:ext cx="11064240" cy="1371600"/>
+          </a:xfrm>
+          <a:prstGeom prst="rect">
+            <a:avLst/>
+          </a:prstGeom>
+          <a:noFill/>
+        </p:spPr>
+        <p:txBody>
+          <a:bodyPr wrap="square">
+            <a:noAutofit/>
+          </a:bodyPr>
+          <a:lstStyle/>
+          <a:p>
+            <a:pPr algn="ctr">
+              <a:lnSpc>
+                <a:spcPts val="2200"/>
+              </a:lnSpc>
+              <a:defRPr sz="3600" b="1">
+                <a:solidFill>
+                  <a:srgbClr val="1A1A2E"/>
+                </a:solidFill>
+                <a:latin typeface="Calibri"/>
+              </a:defRPr>
+            </a:pPr>
+            <a:r>
+              <a:t>Hands-on examples</a:t>
+            </a:r>
+          </a:p>
+        </p:txBody>
+      </p:sp>
+      <p:sp>
+        <p:nvSpPr>
+          <p:cNvPr id="3" name="TextBox 2"/>
+          <p:cNvSpPr txBox="1"/>
+          <p:nvPr/>
+        </p:nvSpPr>
+        <p:spPr>
+          <a:xfrm>
+            <a:off x="548640" y="6355080"/>
+            <a:ext cx="11064240" cy="320040"/>
+          </a:xfrm>
+          <a:prstGeom prst="rect">
+            <a:avLst/>
+          </a:prstGeom>
+          <a:noFill/>
+        </p:spPr>
+        <p:txBody>
+          <a:bodyPr wrap="square">
+            <a:noAutofit/>
+          </a:bodyPr>
+          <a:lstStyle/>
+          <a:p>
+            <a:pPr algn="r">
+              <a:lnSpc>
+                <a:spcPts val="2200"/>
+              </a:lnSpc>
+              <a:defRPr sz="1000" b="0">
+                <a:solidFill>
+                  <a:srgbClr val="666666"/>
+                </a:solidFill>
+                <a:latin typeface="Calibri"/>
+              </a:defRPr>
+            </a:pPr>
+            <a:r>
+              <a:t>learn_uart_spi_i2c / Module 5</a:t>
+            </a:r>
+          </a:p>
+        </p:txBody>
+      </p:sp>
+    </p:spTree>
+  </p:cSld>
+  <p:clrMapOvr>
+    <a:masterClrMapping/>
+  </p:clrMapOvr>
+</p:sld>
+</file>
+
+<file path=ppt/slides/slide23.xml><?xml version="1.0" encoding="utf-8"?>
+<p:sld xmlns:a="http://schemas.openxmlformats.org/drawingml/2006/main" xmlns:p="http://schemas.openxmlformats.org/presentationml/2006/main" xmlns:r="http://schemas.openxmlformats.org/officeDocument/2006/relationships">
+  <p:cSld>
+    <p:spTree>
+      <p:nvGrpSpPr>
+        <p:cNvPr id="1" name=""/>
+        <p:cNvGrpSpPr/>
+        <p:nvPr/>
+      </p:nvGrpSpPr>
+      <p:grpSpPr/>
+      <p:sp>
+        <p:nvSpPr>
+          <p:cNvPr id="2" name="TextBox 1"/>
+          <p:cNvSpPr txBox="1"/>
+          <p:nvPr/>
+        </p:nvSpPr>
+        <p:spPr>
+          <a:xfrm>
+            <a:off x="548640" y="411480"/>
+            <a:ext cx="11064240" cy="777240"/>
+          </a:xfrm>
+          <a:prstGeom prst="rect">
+            <a:avLst/>
+          </a:prstGeom>
+          <a:noFill/>
+        </p:spPr>
+        <p:txBody>
+          <a:bodyPr wrap="square">
+            <a:noAutofit/>
+          </a:bodyPr>
+          <a:lstStyle/>
+          <a:p>
+            <a:pPr>
+              <a:lnSpc>
+                <a:spcPts val="2200"/>
+              </a:lnSpc>
+              <a:defRPr sz="2800" b="1">
+                <a:solidFill>
+                  <a:srgbClr val="1A1A2E"/>
+                </a:solidFill>
+                <a:latin typeface="Calibri"/>
+              </a:defRPr>
+            </a:pPr>
+            <a:r>
+              <a:t>Module 5 self-check</a:t>
+            </a:r>
+          </a:p>
+        </p:txBody>
+      </p:sp>
+      <p:sp>
+        <p:nvSpPr>
+          <p:cNvPr id="3" name="TextBox 2"/>
+          <p:cNvSpPr txBox="1"/>
+          <p:nvPr/>
+        </p:nvSpPr>
+        <p:spPr>
+          <a:xfrm>
+            <a:off x="548640" y="1051560"/>
+            <a:ext cx="11064240" cy="914400"/>
+          </a:xfrm>
+          <a:prstGeom prst="rect">
+            <a:avLst/>
+          </a:prstGeom>
+          <a:solidFill>
+            <a:srgbClr val="F4F4F4"/>
+          </a:solidFill>
+        </p:spPr>
+        <p:txBody>
+          <a:bodyPr wrap="square">
+            <a:noAutofit/>
+          </a:bodyPr>
+          <a:lstStyle/>
+          <a:p>
+            <a:pPr>
+              <a:lnSpc>
+                <a:spcPts val="2200"/>
+              </a:lnSpc>
+              <a:spcAft>
+                <a:spcPts val="200"/>
+              </a:spcAft>
+              <a:defRPr sz="2000" b="0">
+                <a:solidFill>
+                  <a:srgbClr val="333333"/>
+                </a:solidFill>
+                <a:latin typeface="Consolas"/>
+              </a:defRPr>
+            </a:pPr>
+            <a:r>
+              <a:t>$ ./scripts/module5.sh --help</a:t>
+            </a:r>
+          </a:p>
+        </p:txBody>
+      </p:sp>
+      <p:pic>
+        <p:nvPicPr>
+          <p:cNvPr id="4" name="Picture 3" descr="module5_check.png"/>
+          <p:cNvPicPr>
+            <a:picLocks noChangeAspect="1"/>
+          </p:cNvPicPr>
+          <p:nvPr/>
+        </p:nvPicPr>
+        <p:blipFill>
+          <a:blip r:embed="rId2"/>
+          <a:stretch>
+            <a:fillRect/>
+          </a:stretch>
+        </p:blipFill>
+        <p:spPr>
+          <a:xfrm>
+            <a:off x="548640" y="1965960"/>
+            <a:ext cx="7071358" cy="3977639"/>
+          </a:xfrm>
+          <a:prstGeom prst="rect">
+            <a:avLst/>
+          </a:prstGeom>
+        </p:spPr>
+      </p:pic>
+      <p:sp>
+        <p:nvSpPr>
+          <p:cNvPr id="5" name="TextBox 4"/>
+          <p:cNvSpPr txBox="1"/>
+          <p:nvPr/>
+        </p:nvSpPr>
+        <p:spPr>
+          <a:xfrm>
+            <a:off x="548640" y="6355080"/>
+            <a:ext cx="11064240" cy="320040"/>
+          </a:xfrm>
+          <a:prstGeom prst="rect">
+            <a:avLst/>
+          </a:prstGeom>
+          <a:noFill/>
+        </p:spPr>
+        <p:txBody>
+          <a:bodyPr wrap="square">
+            <a:noAutofit/>
+          </a:bodyPr>
+          <a:lstStyle/>
+          <a:p>
+            <a:pPr algn="r">
+              <a:lnSpc>
+                <a:spcPts val="2200"/>
+              </a:lnSpc>
+              <a:defRPr sz="1000" b="0">
+                <a:solidFill>
+                  <a:srgbClr val="666666"/>
+                </a:solidFill>
+                <a:latin typeface="Calibri"/>
+              </a:defRPr>
+            </a:pPr>
+            <a:r>
+              <a:t>learn_uart_spi_i2c / Module 5</a:t>
+            </a:r>
+          </a:p>
+        </p:txBody>
+      </p:sp>
+    </p:spTree>
+  </p:cSld>
+  <p:clrMapOvr>
+    <a:masterClrMapping/>
+  </p:clrMapOvr>
+</p:sld>
+</file>
+
+<file path=ppt/slides/slide24.xml><?xml version="1.0" encoding="utf-8"?>
+<p:sld xmlns:a="http://schemas.openxmlformats.org/drawingml/2006/main" xmlns:p="http://schemas.openxmlformats.org/presentationml/2006/main" xmlns:r="http://schemas.openxmlformats.org/officeDocument/2006/relationships">
+  <p:cSld>
+    <p:spTree>
+      <p:nvGrpSpPr>
+        <p:cNvPr id="1" name=""/>
+        <p:cNvGrpSpPr/>
+        <p:nvPr/>
+      </p:nvGrpSpPr>
+      <p:grpSpPr/>
+      <p:sp>
+        <p:nvSpPr>
+          <p:cNvPr id="2" name="TextBox 1"/>
+          <p:cNvSpPr txBox="1"/>
+          <p:nvPr/>
+        </p:nvSpPr>
+        <p:spPr>
+          <a:xfrm>
+            <a:off x="548640" y="411480"/>
+            <a:ext cx="11064240" cy="777240"/>
+          </a:xfrm>
+          <a:prstGeom prst="rect">
+            <a:avLst/>
+          </a:prstGeom>
+          <a:noFill/>
+        </p:spPr>
+        <p:txBody>
+          <a:bodyPr wrap="square">
+            <a:noAutofit/>
+          </a:bodyPr>
+          <a:lstStyle/>
+          <a:p>
+            <a:pPr>
+              <a:lnSpc>
+                <a:spcPts val="2200"/>
+              </a:lnSpc>
+              <a:defRPr sz="2800" b="1">
+                <a:solidFill>
+                  <a:srgbClr val="1A1A2E"/>
+                </a:solidFill>
+                <a:latin typeface="Calibri"/>
+              </a:defRPr>
+            </a:pPr>
+            <a:r>
+              <a:t>Exercise scaffold</a:t>
+            </a:r>
+          </a:p>
+        </p:txBody>
+      </p:sp>
+      <p:sp>
+        <p:nvSpPr>
+          <p:cNvPr id="3" name="TextBox 2"/>
+          <p:cNvSpPr txBox="1"/>
+          <p:nvPr/>
+        </p:nvSpPr>
+        <p:spPr>
+          <a:xfrm>
+            <a:off x="548640" y="1143000"/>
+            <a:ext cx="11064240" cy="5029200"/>
+          </a:xfrm>
+          <a:prstGeom prst="rect">
+            <a:avLst/>
+          </a:prstGeom>
+          <a:solidFill>
+            <a:srgbClr val="F4F4F4"/>
+          </a:solidFill>
+        </p:spPr>
+        <p:txBody>
+          <a:bodyPr wrap="square">
+            <a:noAutofit/>
+          </a:bodyPr>
+          <a:lstStyle/>
+          <a:p>
+            <a:pPr>
+              <a:lnSpc>
+                <a:spcPts val="2200"/>
+              </a:lnSpc>
+              <a:spcAft>
+                <a:spcPts val="400"/>
+              </a:spcAft>
+              <a:defRPr sz="2000" b="0">
+                <a:solidFill>
+                  <a:srgbClr val="333333"/>
+                </a:solidFill>
+                <a:latin typeface="Consolas"/>
+              </a:defRPr>
+            </a:pPr>
+            <a:r>
+              <a:t>./scripts/module5.sh --scaffold</a:t>
+            </a:r>
+          </a:p>
+        </p:txBody>
+      </p:sp>
+      <p:sp>
+        <p:nvSpPr>
+          <p:cNvPr id="4" name="TextBox 3"/>
+          <p:cNvSpPr txBox="1"/>
+          <p:nvPr/>
+        </p:nvSpPr>
+        <p:spPr>
+          <a:xfrm>
+            <a:off x="548640" y="6355080"/>
+            <a:ext cx="11064240" cy="320040"/>
+          </a:xfrm>
+          <a:prstGeom prst="rect">
+            <a:avLst/>
+          </a:prstGeom>
+          <a:noFill/>
+        </p:spPr>
+        <p:txBody>
+          <a:bodyPr wrap="square">
+            <a:noAutofit/>
+          </a:bodyPr>
+          <a:lstStyle/>
+          <a:p>
+            <a:pPr algn="r">
+              <a:lnSpc>
+                <a:spcPts val="2200"/>
+              </a:lnSpc>
+              <a:defRPr sz="1000" b="0">
+                <a:solidFill>
+                  <a:srgbClr val="666666"/>
+                </a:solidFill>
+                <a:latin typeface="Calibri"/>
+              </a:defRPr>
+            </a:pPr>
+            <a:r>
+              <a:t>learn_uart_spi_i2c / Module 5</a:t>
+            </a:r>
+          </a:p>
+        </p:txBody>
+      </p:sp>
+    </p:spTree>
+  </p:cSld>
+  <p:clrMapOvr>
+    <a:masterClrMapping/>
+  </p:clrMapOvr>
+</p:sld>
+</file>
+
+<file path=ppt/slides/slide25.xml><?xml version="1.0" encoding="utf-8"?>
+<p:sld xmlns:a="http://schemas.openxmlformats.org/drawingml/2006/main" xmlns:p="http://schemas.openxmlformats.org/presentationml/2006/main" xmlns:r="http://schemas.openxmlformats.org/officeDocument/2006/relationships">
+  <p:cSld>
+    <p:spTree>
+      <p:nvGrpSpPr>
+        <p:cNvPr id="1" name=""/>
+        <p:cNvGrpSpPr/>
+        <p:nvPr/>
+      </p:nvGrpSpPr>
+      <p:grpSpPr/>
+      <p:sp>
+        <p:nvSpPr>
+          <p:cNvPr id="2" name="TextBox 1"/>
+          <p:cNvSpPr txBox="1"/>
+          <p:nvPr/>
+        </p:nvSpPr>
+        <p:spPr>
+          <a:xfrm>
+            <a:off x="548640" y="411480"/>
+            <a:ext cx="11064240" cy="777240"/>
+          </a:xfrm>
+          <a:prstGeom prst="rect">
+            <a:avLst/>
+          </a:prstGeom>
+          <a:noFill/>
+        </p:spPr>
+        <p:txBody>
+          <a:bodyPr wrap="square">
+            <a:noAutofit/>
+          </a:bodyPr>
+          <a:lstStyle/>
+          <a:p>
+            <a:pPr>
+              <a:lnSpc>
+                <a:spcPts val="2200"/>
+              </a:lnSpc>
+              <a:defRPr sz="2800" b="1">
+                <a:solidFill>
+                  <a:srgbClr val="1A1A2E"/>
+                </a:solidFill>
+                <a:latin typeface="Calibri"/>
+              </a:defRPr>
+            </a:pPr>
+            <a:r>
+              <a:t>Example 1: SPI baseline</a:t>
+            </a:r>
+          </a:p>
+        </p:txBody>
+      </p:sp>
+      <p:sp>
+        <p:nvSpPr>
+          <p:cNvPr id="3" name="TextBox 2"/>
+          <p:cNvSpPr txBox="1"/>
+          <p:nvPr/>
+        </p:nvSpPr>
+        <p:spPr>
+          <a:xfrm>
+            <a:off x="548640" y="1234440"/>
+            <a:ext cx="11064240" cy="4937760"/>
+          </a:xfrm>
+          <a:prstGeom prst="rect">
+            <a:avLst/>
+          </a:prstGeom>
+          <a:noFill/>
+        </p:spPr>
+        <p:txBody>
+          <a:bodyPr wrap="square">
+            <a:noAutofit/>
+          </a:bodyPr>
+          <a:lstStyle/>
+          <a:p>
+            <a:pPr>
+              <a:lnSpc>
+                <a:spcPts val="2200"/>
+              </a:lnSpc>
+              <a:spcAft>
+                <a:spcPts val="1000"/>
+              </a:spcAft>
+              <a:defRPr sz="2000" b="0">
+                <a:solidFill>
+                  <a:srgbClr val="333333"/>
+                </a:solidFill>
+                <a:latin typeface="Calibri"/>
+              </a:defRPr>
+            </a:pPr>
+            <a:r>
+              <a:t>• `dut/`: `spi_master.v`, `clk_div.v`</a:t>
+            </a:r>
+          </a:p>
+          <a:p>
+            <a:pPr>
+              <a:lnSpc>
+                <a:spcPts val="2200"/>
+              </a:lnSpc>
+              <a:spcAft>
+                <a:spcPts val="1000"/>
+              </a:spcAft>
+              <a:defRPr sz="2000" b="0">
+                <a:solidFill>
+                  <a:srgbClr val="333333"/>
+                </a:solidFill>
+                <a:latin typeface="Calibri"/>
+              </a:defRPr>
+            </a:pPr>
+            <a:r>
+              <a:t>• `top_spi_baseline.sv`: Top with clk_div, spi_master;</a:t>
+            </a:r>
+          </a:p>
+          <a:p>
+            <a:pPr>
+              <a:lnSpc>
+                <a:spcPts val="2200"/>
+              </a:lnSpc>
+              <a:spcAft>
+                <a:spcPts val="1000"/>
+              </a:spcAft>
+              <a:defRPr sz="2000" b="0">
+                <a:solidFill>
+                  <a:srgbClr val="333333"/>
+                </a:solidFill>
+                <a:latin typeface="Calibri"/>
+              </a:defRPr>
+            </a:pPr>
+            <a:r>
+              <a:t>      directed stimulus and checks in initial blocks.</a:t>
+            </a:r>
+          </a:p>
+          <a:p>
+            <a:pPr>
+              <a:lnSpc>
+                <a:spcPts val="2200"/>
+              </a:lnSpc>
+              <a:spcAft>
+                <a:spcPts val="1000"/>
+              </a:spcAft>
+              <a:defRPr sz="2000" b="0">
+                <a:solidFill>
+                  <a:srgbClr val="333333"/>
+                </a:solidFill>
+                <a:latin typeface="Calibri"/>
+              </a:defRPr>
+            </a:pPr>
+            <a:r>
+              <a:t>• `sim_main.cpp`: C++ harness (clock, reset);</a:t>
+            </a:r>
+          </a:p>
+          <a:p>
+            <a:pPr>
+              <a:lnSpc>
+                <a:spcPts val="2200"/>
+              </a:lnSpc>
+              <a:spcAft>
+                <a:spcPts val="1000"/>
+              </a:spcAft>
+              <a:defRPr sz="2000" b="0">
+                <a:solidFill>
+                  <a:srgbClr val="333333"/>
+                </a:solidFill>
+                <a:latin typeface="Calibri"/>
+              </a:defRPr>
+            </a:pPr>
+            <a:r>
+              <a:t>      simulation runs until `$finish`.</a:t>
+            </a:r>
+          </a:p>
+        </p:txBody>
+      </p:sp>
+      <p:sp>
+        <p:nvSpPr>
+          <p:cNvPr id="4" name="TextBox 3"/>
+          <p:cNvSpPr txBox="1"/>
+          <p:nvPr/>
+        </p:nvSpPr>
+        <p:spPr>
+          <a:xfrm>
+            <a:off x="548640" y="6355080"/>
+            <a:ext cx="11064240" cy="320040"/>
+          </a:xfrm>
+          <a:prstGeom prst="rect">
+            <a:avLst/>
+          </a:prstGeom>
+          <a:noFill/>
+        </p:spPr>
+        <p:txBody>
+          <a:bodyPr wrap="square">
+            <a:noAutofit/>
+          </a:bodyPr>
+          <a:lstStyle/>
+          <a:p>
+            <a:pPr algn="r">
+              <a:lnSpc>
+                <a:spcPts val="2200"/>
+              </a:lnSpc>
+              <a:defRPr sz="1000" b="0">
+                <a:solidFill>
+                  <a:srgbClr val="666666"/>
+                </a:solidFill>
+                <a:latin typeface="Calibri"/>
+              </a:defRPr>
+            </a:pPr>
+            <a:r>
+              <a:t>learn_uart_spi_i2c / Module 5</a:t>
+            </a:r>
+          </a:p>
+        </p:txBody>
+      </p:sp>
+    </p:spTree>
+  </p:cSld>
+  <p:clrMapOvr>
+    <a:masterClrMapping/>
+  </p:clrMapOvr>
+</p:sld>
+</file>
+
+<file path=ppt/slides/slide26.xml><?xml version="1.0" encoding="utf-8"?>
+<p:sld xmlns:a="http://schemas.openxmlformats.org/drawingml/2006/main" xmlns:p="http://schemas.openxmlformats.org/presentationml/2006/main" xmlns:r="http://schemas.openxmlformats.org/officeDocument/2006/relationships">
+  <p:cSld>
+    <p:spTree>
+      <p:nvGrpSpPr>
+        <p:cNvPr id="1" name=""/>
+        <p:cNvGrpSpPr/>
+        <p:nvPr/>
+      </p:nvGrpSpPr>
+      <p:grpSpPr/>
+      <p:sp>
+        <p:nvSpPr>
+          <p:cNvPr id="2" name="TextBox 1"/>
+          <p:cNvSpPr txBox="1"/>
+          <p:nvPr/>
+        </p:nvSpPr>
+        <p:spPr>
+          <a:xfrm>
+            <a:off x="548640" y="411480"/>
+            <a:ext cx="11064240" cy="777240"/>
+          </a:xfrm>
+          <a:prstGeom prst="rect">
+            <a:avLst/>
+          </a:prstGeom>
+          <a:noFill/>
+        </p:spPr>
+        <p:txBody>
+          <a:bodyPr wrap="square">
+            <a:noAutofit/>
+          </a:bodyPr>
+          <a:lstStyle/>
+          <a:p>
+            <a:pPr>
+              <a:lnSpc>
+                <a:spcPts val="2200"/>
+              </a:lnSpc>
+              <a:defRPr sz="2800" b="1">
+                <a:solidFill>
+                  <a:srgbClr val="1A1A2E"/>
+                </a:solidFill>
+                <a:latin typeface="Calibri"/>
+              </a:defRPr>
+            </a:pPr>
+            <a:r>
+              <a:t>Demo: SPI baseline</a:t>
+            </a:r>
+          </a:p>
+        </p:txBody>
+      </p:sp>
+      <p:sp>
+        <p:nvSpPr>
+          <p:cNvPr id="3" name="TextBox 2"/>
+          <p:cNvSpPr txBox="1"/>
+          <p:nvPr/>
+        </p:nvSpPr>
+        <p:spPr>
+          <a:xfrm>
+            <a:off x="548640" y="1051560"/>
+            <a:ext cx="11064240" cy="914400"/>
+          </a:xfrm>
+          <a:prstGeom prst="rect">
+            <a:avLst/>
+          </a:prstGeom>
+          <a:solidFill>
+            <a:srgbClr val="F4F4F4"/>
+          </a:solidFill>
+        </p:spPr>
+        <p:txBody>
+          <a:bodyPr wrap="square">
+            <a:noAutofit/>
+          </a:bodyPr>
+          <a:lstStyle/>
+          <a:p>
+            <a:pPr>
+              <a:lnSpc>
+                <a:spcPts val="2200"/>
+              </a:lnSpc>
+              <a:spcAft>
+                <a:spcPts val="200"/>
+              </a:spcAft>
+              <a:defRPr sz="2000" b="0">
+                <a:solidFill>
+                  <a:srgbClr val="333333"/>
+                </a:solidFill>
+                <a:latin typeface="Consolas"/>
+              </a:defRPr>
+            </a:pPr>
+            <a:r>
+              <a:t>$ ./scripts/module5.sh --run</a:t>
+            </a:r>
+          </a:p>
+        </p:txBody>
+      </p:sp>
+      <p:pic>
+        <p:nvPicPr>
+          <p:cNvPr id="4" name="Picture 3" descr="spi_baseline.png"/>
+          <p:cNvPicPr>
+            <a:picLocks noChangeAspect="1"/>
+          </p:cNvPicPr>
+          <p:nvPr/>
+        </p:nvPicPr>
+        <p:blipFill>
+          <a:blip r:embed="rId2"/>
+          <a:stretch>
+            <a:fillRect/>
+          </a:stretch>
+        </p:blipFill>
+        <p:spPr>
+          <a:xfrm>
+            <a:off x="548640" y="1965960"/>
+            <a:ext cx="7071358" cy="3977639"/>
+          </a:xfrm>
+          <a:prstGeom prst="rect">
+            <a:avLst/>
+          </a:prstGeom>
+        </p:spPr>
+      </p:pic>
+      <p:sp>
+        <p:nvSpPr>
+          <p:cNvPr id="5" name="TextBox 4"/>
+          <p:cNvSpPr txBox="1"/>
+          <p:nvPr/>
+        </p:nvSpPr>
+        <p:spPr>
+          <a:xfrm>
+            <a:off x="548640" y="6355080"/>
+            <a:ext cx="11064240" cy="320040"/>
+          </a:xfrm>
+          <a:prstGeom prst="rect">
+            <a:avLst/>
+          </a:prstGeom>
+          <a:noFill/>
+        </p:spPr>
+        <p:txBody>
+          <a:bodyPr wrap="square">
+            <a:noAutofit/>
+          </a:bodyPr>
+          <a:lstStyle/>
+          <a:p>
+            <a:pPr algn="r">
+              <a:lnSpc>
+                <a:spcPts val="2200"/>
+              </a:lnSpc>
+              <a:defRPr sz="1000" b="0">
+                <a:solidFill>
+                  <a:srgbClr val="666666"/>
+                </a:solidFill>
+                <a:latin typeface="Calibri"/>
+              </a:defRPr>
+            </a:pPr>
+            <a:r>
+              <a:t>learn_uart_spi_i2c / Module 5</a:t>
+            </a:r>
+          </a:p>
+        </p:txBody>
+      </p:sp>
+    </p:spTree>
+  </p:cSld>
+  <p:clrMapOvr>
+    <a:masterClrMapping/>
+  </p:clrMapOvr>
+</p:sld>
+</file>
+
+<file path=ppt/slides/slide27.xml><?xml version="1.0" encoding="utf-8"?>
+<p:sld xmlns:a="http://schemas.openxmlformats.org/drawingml/2006/main" xmlns:p="http://schemas.openxmlformats.org/presentationml/2006/main" xmlns:r="http://schemas.openxmlformats.org/officeDocument/2006/relationships">
+  <p:cSld>
+    <p:spTree>
+      <p:nvGrpSpPr>
+        <p:cNvPr id="1" name=""/>
+        <p:cNvGrpSpPr/>
+        <p:nvPr/>
+      </p:nvGrpSpPr>
+      <p:grpSpPr/>
+      <p:sp>
+        <p:nvSpPr>
+          <p:cNvPr id="2" name="TextBox 1"/>
+          <p:cNvSpPr txBox="1"/>
+          <p:nvPr/>
+        </p:nvSpPr>
+        <p:spPr>
+          <a:xfrm>
+            <a:off x="548640" y="2743200"/>
+            <a:ext cx="11064240" cy="1371600"/>
+          </a:xfrm>
+          <a:prstGeom prst="rect">
+            <a:avLst/>
+          </a:prstGeom>
+          <a:noFill/>
+        </p:spPr>
+        <p:txBody>
+          <a:bodyPr wrap="square">
+            <a:noAutofit/>
+          </a:bodyPr>
+          <a:lstStyle/>
+          <a:p>
+            <a:pPr algn="ctr">
+              <a:lnSpc>
+                <a:spcPts val="2200"/>
+              </a:lnSpc>
+              <a:defRPr sz="3600" b="1">
+                <a:solidFill>
+                  <a:srgbClr val="1A1A2E"/>
+                </a:solidFill>
+                <a:latin typeface="Calibri"/>
+              </a:defRPr>
+            </a:pPr>
+            <a:r>
+              <a:t>Practice &amp; assessment</a:t>
+            </a:r>
+          </a:p>
+        </p:txBody>
+      </p:sp>
+      <p:sp>
+        <p:nvSpPr>
+          <p:cNvPr id="3" name="TextBox 2"/>
+          <p:cNvSpPr txBox="1"/>
+          <p:nvPr/>
+        </p:nvSpPr>
+        <p:spPr>
+          <a:xfrm>
+            <a:off x="548640" y="6355080"/>
+            <a:ext cx="11064240" cy="320040"/>
+          </a:xfrm>
+          <a:prstGeom prst="rect">
+            <a:avLst/>
+          </a:prstGeom>
+          <a:noFill/>
+        </p:spPr>
+        <p:txBody>
+          <a:bodyPr wrap="square">
+            <a:noAutofit/>
+          </a:bodyPr>
+          <a:lstStyle/>
+          <a:p>
+            <a:pPr algn="r">
+              <a:lnSpc>
+                <a:spcPts val="2200"/>
+              </a:lnSpc>
+              <a:defRPr sz="1000" b="0">
+                <a:solidFill>
+                  <a:srgbClr val="666666"/>
+                </a:solidFill>
+                <a:latin typeface="Calibri"/>
+              </a:defRPr>
+            </a:pPr>
+            <a:r>
+              <a:t>learn_uart_spi_i2c / Module 5</a:t>
+            </a:r>
+          </a:p>
+        </p:txBody>
+      </p:sp>
+    </p:spTree>
+  </p:cSld>
+  <p:clrMapOvr>
+    <a:masterClrMapping/>
+  </p:clrMapOvr>
+</p:sld>
+</file>
+
+<file path=ppt/slides/slide28.xml><?xml version="1.0" encoding="utf-8"?>
+<p:sld xmlns:a="http://schemas.openxmlformats.org/drawingml/2006/main" xmlns:p="http://schemas.openxmlformats.org/presentationml/2006/main" xmlns:r="http://schemas.openxmlformats.org/officeDocument/2006/relationships">
+  <p:cSld>
+    <p:spTree>
+      <p:nvGrpSpPr>
+        <p:cNvPr id="1" name=""/>
+        <p:cNvGrpSpPr/>
+        <p:nvPr/>
+      </p:nvGrpSpPr>
+      <p:grpSpPr/>
+      <p:sp>
+        <p:nvSpPr>
+          <p:cNvPr id="2" name="TextBox 1"/>
+          <p:cNvSpPr txBox="1"/>
+          <p:nvPr/>
+        </p:nvSpPr>
+        <p:spPr>
+          <a:xfrm>
+            <a:off x="548640" y="411480"/>
+            <a:ext cx="11064240" cy="777240"/>
+          </a:xfrm>
+          <a:prstGeom prst="rect">
+            <a:avLst/>
+          </a:prstGeom>
+          <a:noFill/>
+        </p:spPr>
+        <p:txBody>
+          <a:bodyPr wrap="square">
+            <a:noAutofit/>
+          </a:bodyPr>
+          <a:lstStyle/>
+          <a:p>
+            <a:pPr>
+              <a:lnSpc>
+                <a:spcPts val="2200"/>
+              </a:lnSpc>
+              <a:defRPr sz="2800" b="1">
+                <a:solidFill>
+                  <a:srgbClr val="1A1A2E"/>
+                </a:solidFill>
+                <a:latin typeface="Calibri"/>
+              </a:defRPr>
+            </a:pPr>
+            <a:r>
+              <a:t>What you should know</a:t>
+            </a:r>
+          </a:p>
+        </p:txBody>
+      </p:sp>
+      <p:sp>
+        <p:nvSpPr>
+          <p:cNvPr id="3" name="TextBox 2"/>
+          <p:cNvSpPr txBox="1"/>
+          <p:nvPr/>
+        </p:nvSpPr>
+        <p:spPr>
+          <a:xfrm>
+            <a:off x="548640" y="1234440"/>
+            <a:ext cx="11064240" cy="4937760"/>
+          </a:xfrm>
+          <a:prstGeom prst="rect">
+            <a:avLst/>
+          </a:prstGeom>
+          <a:noFill/>
+        </p:spPr>
+        <p:txBody>
+          <a:bodyPr wrap="square">
+            <a:noAutofit/>
+          </a:bodyPr>
+          <a:lstStyle/>
+          <a:p>
+            <a:pPr>
+              <a:lnSpc>
+                <a:spcPts val="2200"/>
+              </a:lnSpc>
+              <a:spcAft>
+                <a:spcPts val="1000"/>
+              </a:spcAft>
+              <a:defRPr sz="2000" b="0">
+                <a:solidFill>
+                  <a:srgbClr val="333333"/>
+                </a:solidFill>
+                <a:latin typeface="Calibri"/>
+              </a:defRPr>
+            </a:pPr>
+            <a:r>
+              <a:t>• Describe SPI mode 0 and the role of sclk, mosi,</a:t>
+            </a:r>
+          </a:p>
+          <a:p>
+            <a:pPr>
+              <a:lnSpc>
+                <a:spcPts val="2200"/>
+              </a:lnSpc>
+              <a:spcAft>
+                <a:spcPts val="1000"/>
+              </a:spcAft>
+              <a:defRPr sz="2000" b="0">
+                <a:solidFill>
+                  <a:srgbClr val="333333"/>
+                </a:solidFill>
+                <a:latin typeface="Calibri"/>
+              </a:defRPr>
+            </a:pPr>
+            <a:r>
+              <a:t>      cs_n, clk_div_tick.</a:t>
+            </a:r>
+          </a:p>
+          <a:p>
+            <a:pPr>
+              <a:lnSpc>
+                <a:spcPts val="2200"/>
+              </a:lnSpc>
+              <a:spcAft>
+                <a:spcPts val="1000"/>
+              </a:spcAft>
+              <a:defRPr sz="2000" b="0">
+                <a:solidFill>
+                  <a:srgbClr val="333333"/>
+                </a:solidFill>
+                <a:latin typeface="Calibri"/>
+              </a:defRPr>
+            </a:pPr>
+            <a:r>
+              <a:t>• Explain the role of spi_master and clk_div.</a:t>
+            </a:r>
+          </a:p>
+          <a:p>
+            <a:pPr>
+              <a:lnSpc>
+                <a:spcPts val="2200"/>
+              </a:lnSpc>
+              <a:spcAft>
+                <a:spcPts val="1000"/>
+              </a:spcAft>
+              <a:defRPr sz="2000" b="0">
+                <a:solidFill>
+                  <a:srgbClr val="333333"/>
+                </a:solidFill>
+                <a:latin typeface="Calibri"/>
+              </a:defRPr>
+            </a:pPr>
+            <a:r>
+              <a:t>• Run the spi_baseline example and interpret the</a:t>
+            </a:r>
+          </a:p>
+          <a:p>
+            <a:pPr>
+              <a:lnSpc>
+                <a:spcPts val="2200"/>
+              </a:lnSpc>
+              <a:spcAft>
+                <a:spcPts val="1000"/>
+              </a:spcAft>
+              <a:defRPr sz="2000" b="0">
+                <a:solidFill>
+                  <a:srgbClr val="333333"/>
+                </a:solidFill>
+                <a:latin typeface="Calibri"/>
+              </a:defRPr>
+            </a:pPr>
+            <a:r>
+              <a:t>      directed test.</a:t>
+            </a:r>
+          </a:p>
+          <a:p>
+            <a:pPr>
+              <a:lnSpc>
+                <a:spcPts val="2200"/>
+              </a:lnSpc>
+              <a:spcAft>
+                <a:spcPts val="1000"/>
+              </a:spcAft>
+              <a:defRPr sz="2000" b="0">
+                <a:solidFill>
+                  <a:srgbClr val="333333"/>
+                </a:solidFill>
+                <a:latin typeface="Calibri"/>
+              </a:defRPr>
+            </a:pPr>
+            <a:r>
+              <a:t>• Ready for Module 6: SPI UVM+SV verification.</a:t>
+            </a:r>
+          </a:p>
+        </p:txBody>
+      </p:sp>
+      <p:sp>
+        <p:nvSpPr>
+          <p:cNvPr id="4" name="TextBox 3"/>
+          <p:cNvSpPr txBox="1"/>
+          <p:nvPr/>
+        </p:nvSpPr>
+        <p:spPr>
+          <a:xfrm>
+            <a:off x="548640" y="6355080"/>
+            <a:ext cx="11064240" cy="320040"/>
+          </a:xfrm>
+          <a:prstGeom prst="rect">
+            <a:avLst/>
+          </a:prstGeom>
+          <a:noFill/>
+        </p:spPr>
+        <p:txBody>
+          <a:bodyPr wrap="square">
+            <a:noAutofit/>
+          </a:bodyPr>
+          <a:lstStyle/>
+          <a:p>
+            <a:pPr algn="r">
+              <a:lnSpc>
+                <a:spcPts val="2200"/>
+              </a:lnSpc>
+              <a:defRPr sz="1000" b="0">
+                <a:solidFill>
+                  <a:srgbClr val="666666"/>
+                </a:solidFill>
+                <a:latin typeface="Calibri"/>
+              </a:defRPr>
+            </a:pPr>
+            <a:r>
+              <a:t>learn_uart_spi_i2c / Module 5</a:t>
+            </a:r>
+          </a:p>
+        </p:txBody>
+      </p:sp>
+    </p:spTree>
+  </p:cSld>
+  <p:clrMapOvr>
+    <a:masterClrMapping/>
+  </p:clrMapOvr>
+</p:sld>
+</file>
+
+<file path=ppt/slides/slide29.xml><?xml version="1.0" encoding="utf-8"?>
+<p:sld xmlns:a="http://schemas.openxmlformats.org/drawingml/2006/main" xmlns:p="http://schemas.openxmlformats.org/presentationml/2006/main" xmlns:r="http://schemas.openxmlformats.org/officeDocument/2006/relationships">
+  <p:cSld>
+    <p:spTree>
+      <p:nvGrpSpPr>
+        <p:cNvPr id="1" name=""/>
+        <p:cNvGrpSpPr/>
+        <p:nvPr/>
+      </p:nvGrpSpPr>
+      <p:grpSpPr/>
+      <p:sp>
+        <p:nvSpPr>
+          <p:cNvPr id="2" name="TextBox 1"/>
+          <p:cNvSpPr txBox="1"/>
+          <p:nvPr/>
+        </p:nvSpPr>
+        <p:spPr>
+          <a:xfrm>
+            <a:off x="548640" y="411480"/>
+            <a:ext cx="11064240" cy="777240"/>
+          </a:xfrm>
+          <a:prstGeom prst="rect">
+            <a:avLst/>
+          </a:prstGeom>
+          <a:noFill/>
+        </p:spPr>
+        <p:txBody>
+          <a:bodyPr wrap="square">
+            <a:noAutofit/>
+          </a:bodyPr>
+          <a:lstStyle/>
+          <a:p>
+            <a:pPr>
+              <a:lnSpc>
+                <a:spcPts val="2200"/>
+              </a:lnSpc>
+              <a:defRPr sz="2800" b="1">
+                <a:solidFill>
+                  <a:srgbClr val="1A1A2E"/>
+                </a:solidFill>
+                <a:latin typeface="Calibri"/>
+              </a:defRPr>
+            </a:pPr>
+            <a:r>
+              <a:t>Exercises</a:t>
+            </a:r>
+          </a:p>
+        </p:txBody>
+      </p:sp>
+      <p:sp>
+        <p:nvSpPr>
+          <p:cNvPr id="3" name="TextBox 2"/>
+          <p:cNvSpPr txBox="1"/>
+          <p:nvPr/>
+        </p:nvSpPr>
+        <p:spPr>
+          <a:xfrm>
+            <a:off x="548640" y="1234440"/>
+            <a:ext cx="11064240" cy="4937760"/>
+          </a:xfrm>
+          <a:prstGeom prst="rect">
+            <a:avLst/>
+          </a:prstGeom>
+          <a:noFill/>
+        </p:spPr>
+        <p:txBody>
+          <a:bodyPr wrap="square">
+            <a:noAutofit/>
+          </a:bodyPr>
+          <a:lstStyle/>
+          <a:p>
+            <a:pPr>
+              <a:lnSpc>
+                <a:spcPts val="2200"/>
+              </a:lnSpc>
+              <a:spcAft>
+                <a:spcPts val="1000"/>
+              </a:spcAft>
+              <a:defRPr sz="2000" b="0">
+                <a:solidFill>
+                  <a:srgbClr val="333333"/>
+                </a:solidFill>
+                <a:latin typeface="Calibri"/>
+              </a:defRPr>
+            </a:pPr>
+            <a:r>
+              <a:t>• Run spi_baseline</a:t>
+            </a:r>
+          </a:p>
+          <a:p>
+            <a:pPr>
+              <a:lnSpc>
+                <a:spcPts val="2200"/>
+              </a:lnSpc>
+              <a:spcAft>
+                <a:spcPts val="1000"/>
+              </a:spcAft>
+              <a:defRPr sz="2000" b="0">
+                <a:solidFill>
+                  <a:srgbClr val="333333"/>
+                </a:solidFill>
+                <a:latin typeface="Calibri"/>
+              </a:defRPr>
+            </a:pPr>
+            <a:r>
+              <a:t>• Trace one transfer</a:t>
+            </a:r>
+          </a:p>
+          <a:p>
+            <a:pPr>
+              <a:lnSpc>
+                <a:spcPts val="2200"/>
+              </a:lnSpc>
+              <a:spcAft>
+                <a:spcPts val="1000"/>
+              </a:spcAft>
+              <a:defRPr sz="2000" b="0">
+                <a:solidFill>
+                  <a:srgbClr val="333333"/>
+                </a:solidFill>
+                <a:latin typeface="Calibri"/>
+              </a:defRPr>
+            </a:pPr>
+            <a:r>
+              <a:t>• Mode 0 timing</a:t>
+            </a:r>
+          </a:p>
+          <a:p>
+            <a:pPr>
+              <a:lnSpc>
+                <a:spcPts val="2200"/>
+              </a:lnSpc>
+              <a:spcAft>
+                <a:spcPts val="1000"/>
+              </a:spcAft>
+              <a:defRPr sz="2000" b="0">
+                <a:solidFill>
+                  <a:srgbClr val="333333"/>
+                </a:solidFill>
+                <a:latin typeface="Calibri"/>
+              </a:defRPr>
+            </a:pPr>
+            <a:r>
+              <a:t>• Optional: Waveforms</a:t>
             </a:r>
           </a:p>
         </p:txBody>
@@ -5881,6 +8267,510 @@
 </p:sld>
 </file>
 
+<file path=ppt/slides/slide30.xml><?xml version="1.0" encoding="utf-8"?>
+<p:sld xmlns:a="http://schemas.openxmlformats.org/drawingml/2006/main" xmlns:p="http://schemas.openxmlformats.org/presentationml/2006/main" xmlns:r="http://schemas.openxmlformats.org/officeDocument/2006/relationships">
+  <p:cSld>
+    <p:spTree>
+      <p:nvGrpSpPr>
+        <p:cNvPr id="1" name=""/>
+        <p:cNvGrpSpPr/>
+        <p:nvPr/>
+      </p:nvGrpSpPr>
+      <p:grpSpPr/>
+      <p:sp>
+        <p:nvSpPr>
+          <p:cNvPr id="2" name="TextBox 1"/>
+          <p:cNvSpPr txBox="1"/>
+          <p:nvPr/>
+        </p:nvSpPr>
+        <p:spPr>
+          <a:xfrm>
+            <a:off x="548640" y="411480"/>
+            <a:ext cx="11064240" cy="777240"/>
+          </a:xfrm>
+          <a:prstGeom prst="rect">
+            <a:avLst/>
+          </a:prstGeom>
+          <a:noFill/>
+        </p:spPr>
+        <p:txBody>
+          <a:bodyPr wrap="square">
+            <a:noAutofit/>
+          </a:bodyPr>
+          <a:lstStyle/>
+          <a:p>
+            <a:pPr>
+              <a:lnSpc>
+                <a:spcPts val="2200"/>
+              </a:lnSpc>
+              <a:defRPr sz="2800" b="1">
+                <a:solidFill>
+                  <a:srgbClr val="1A1A2E"/>
+                </a:solidFill>
+                <a:latin typeface="Calibri"/>
+              </a:defRPr>
+            </a:pPr>
+            <a:r>
+              <a:t>Assessment checklist</a:t>
+            </a:r>
+          </a:p>
+        </p:txBody>
+      </p:sp>
+      <p:sp>
+        <p:nvSpPr>
+          <p:cNvPr id="3" name="TextBox 2"/>
+          <p:cNvSpPr txBox="1"/>
+          <p:nvPr/>
+        </p:nvSpPr>
+        <p:spPr>
+          <a:xfrm>
+            <a:off x="548640" y="1234440"/>
+            <a:ext cx="11064240" cy="4937760"/>
+          </a:xfrm>
+          <a:prstGeom prst="rect">
+            <a:avLst/>
+          </a:prstGeom>
+          <a:noFill/>
+        </p:spPr>
+        <p:txBody>
+          <a:bodyPr wrap="square">
+            <a:noAutofit/>
+          </a:bodyPr>
+          <a:lstStyle/>
+          <a:p>
+            <a:pPr>
+              <a:lnSpc>
+                <a:spcPts val="2200"/>
+              </a:lnSpc>
+              <a:spcAft>
+                <a:spcPts val="1000"/>
+              </a:spcAft>
+              <a:defRPr sz="2000" b="0">
+                <a:solidFill>
+                  <a:srgbClr val="333333"/>
+                </a:solidFill>
+                <a:latin typeface="Calibri"/>
+              </a:defRPr>
+            </a:pPr>
+            <a:r>
+              <a:t>• Can describe SPI mode 0 (idle low, capture on</a:t>
+            </a:r>
+          </a:p>
+          <a:p>
+            <a:pPr>
+              <a:lnSpc>
+                <a:spcPts val="2200"/>
+              </a:lnSpc>
+              <a:spcAft>
+                <a:spcPts val="1000"/>
+              </a:spcAft>
+              <a:defRPr sz="2000" b="0">
+                <a:solidFill>
+                  <a:srgbClr val="333333"/>
+                </a:solidFill>
+                <a:latin typeface="Calibri"/>
+              </a:defRPr>
+            </a:pPr>
+            <a:r>
+              <a:t>      rising, change on falling) and signals sclk, mosi,</a:t>
+            </a:r>
+          </a:p>
+          <a:p>
+            <a:pPr>
+              <a:lnSpc>
+                <a:spcPts val="2200"/>
+              </a:lnSpc>
+              <a:spcAft>
+                <a:spcPts val="1000"/>
+              </a:spcAft>
+              <a:defRPr sz="2000" b="0">
+                <a:solidFill>
+                  <a:srgbClr val="333333"/>
+                </a:solidFill>
+                <a:latin typeface="Calibri"/>
+              </a:defRPr>
+            </a:pPr>
+            <a:r>
+              <a:t>      cs…</a:t>
+            </a:r>
+          </a:p>
+          <a:p>
+            <a:pPr>
+              <a:lnSpc>
+                <a:spcPts val="2200"/>
+              </a:lnSpc>
+              <a:spcAft>
+                <a:spcPts val="1000"/>
+              </a:spcAft>
+              <a:defRPr sz="2000" b="0">
+                <a:solidFill>
+                  <a:srgbClr val="333333"/>
+                </a:solidFill>
+                <a:latin typeface="Calibri"/>
+              </a:defRPr>
+            </a:pPr>
+            <a:r>
+              <a:t>• Can explain the role of spi_master and clk_div in</a:t>
+            </a:r>
+          </a:p>
+          <a:p>
+            <a:pPr>
+              <a:lnSpc>
+                <a:spcPts val="2200"/>
+              </a:lnSpc>
+              <a:spcAft>
+                <a:spcPts val="1000"/>
+              </a:spcAft>
+              <a:defRPr sz="2000" b="0">
+                <a:solidFill>
+                  <a:srgbClr val="333333"/>
+                </a:solidFill>
+                <a:latin typeface="Calibri"/>
+              </a:defRPr>
+            </a:pPr>
+            <a:r>
+              <a:t>      the RTL.</a:t>
+            </a:r>
+          </a:p>
+          <a:p>
+            <a:pPr>
+              <a:lnSpc>
+                <a:spcPts val="2200"/>
+              </a:lnSpc>
+              <a:spcAft>
+                <a:spcPts val="1000"/>
+              </a:spcAft>
+              <a:defRPr sz="2000" b="0">
+                <a:solidFill>
+                  <a:srgbClr val="333333"/>
+                </a:solidFill>
+                <a:latin typeface="Calibri"/>
+              </a:defRPr>
+            </a:pPr>
+            <a:r>
+              <a:t>• Can run spi_baseline and interpret the directed test</a:t>
+            </a:r>
+          </a:p>
+          <a:p>
+            <a:pPr>
+              <a:lnSpc>
+                <a:spcPts val="2200"/>
+              </a:lnSpc>
+              <a:spcAft>
+                <a:spcPts val="1000"/>
+              </a:spcAft>
+              <a:defRPr sz="2000" b="0">
+                <a:solidFill>
+                  <a:srgbClr val="333333"/>
+                </a:solidFill>
+                <a:latin typeface="Calibri"/>
+              </a:defRPr>
+            </a:pPr>
+            <a:r>
+              <a:t>      result.</a:t>
+            </a:r>
+          </a:p>
+          <a:p>
+            <a:pPr>
+              <a:lnSpc>
+                <a:spcPts val="2200"/>
+              </a:lnSpc>
+              <a:spcAft>
+                <a:spcPts val="1000"/>
+              </a:spcAft>
+              <a:defRPr sz="2000" b="0">
+                <a:solidFill>
+                  <a:srgbClr val="333333"/>
+                </a:solidFill>
+                <a:latin typeface="Calibri"/>
+              </a:defRPr>
+            </a:pPr>
+            <a:r>
+              <a:t>• Ready for Module 6: SPI UVM+SV verification.</a:t>
+            </a:r>
+          </a:p>
+        </p:txBody>
+      </p:sp>
+      <p:sp>
+        <p:nvSpPr>
+          <p:cNvPr id="4" name="TextBox 3"/>
+          <p:cNvSpPr txBox="1"/>
+          <p:nvPr/>
+        </p:nvSpPr>
+        <p:spPr>
+          <a:xfrm>
+            <a:off x="548640" y="6355080"/>
+            <a:ext cx="11064240" cy="320040"/>
+          </a:xfrm>
+          <a:prstGeom prst="rect">
+            <a:avLst/>
+          </a:prstGeom>
+          <a:noFill/>
+        </p:spPr>
+        <p:txBody>
+          <a:bodyPr wrap="square">
+            <a:noAutofit/>
+          </a:bodyPr>
+          <a:lstStyle/>
+          <a:p>
+            <a:pPr algn="r">
+              <a:lnSpc>
+                <a:spcPts val="2200"/>
+              </a:lnSpc>
+              <a:defRPr sz="1000" b="0">
+                <a:solidFill>
+                  <a:srgbClr val="666666"/>
+                </a:solidFill>
+                <a:latin typeface="Calibri"/>
+              </a:defRPr>
+            </a:pPr>
+            <a:r>
+              <a:t>learn_uart_spi_i2c / Module 5</a:t>
+            </a:r>
+          </a:p>
+        </p:txBody>
+      </p:sp>
+    </p:spTree>
+  </p:cSld>
+  <p:clrMapOvr>
+    <a:masterClrMapping/>
+  </p:clrMapOvr>
+</p:sld>
+</file>
+
+<file path=ppt/slides/slide31.xml><?xml version="1.0" encoding="utf-8"?>
+<p:sld xmlns:a="http://schemas.openxmlformats.org/drawingml/2006/main" xmlns:p="http://schemas.openxmlformats.org/presentationml/2006/main" xmlns:r="http://schemas.openxmlformats.org/officeDocument/2006/relationships">
+  <p:cSld>
+    <p:spTree>
+      <p:nvGrpSpPr>
+        <p:cNvPr id="1" name=""/>
+        <p:cNvGrpSpPr/>
+        <p:nvPr/>
+      </p:nvGrpSpPr>
+      <p:grpSpPr/>
+      <p:sp>
+        <p:nvSpPr>
+          <p:cNvPr id="2" name="TextBox 1"/>
+          <p:cNvSpPr txBox="1"/>
+          <p:nvPr/>
+        </p:nvSpPr>
+        <p:spPr>
+          <a:xfrm>
+            <a:off x="548640" y="411480"/>
+            <a:ext cx="11064240" cy="777240"/>
+          </a:xfrm>
+          <a:prstGeom prst="rect">
+            <a:avLst/>
+          </a:prstGeom>
+          <a:noFill/>
+        </p:spPr>
+        <p:txBody>
+          <a:bodyPr wrap="square">
+            <a:noAutofit/>
+          </a:bodyPr>
+          <a:lstStyle/>
+          <a:p>
+            <a:pPr>
+              <a:lnSpc>
+                <a:spcPts val="2200"/>
+              </a:lnSpc>
+              <a:defRPr sz="2800" b="1">
+                <a:solidFill>
+                  <a:srgbClr val="1A1A2E"/>
+                </a:solidFill>
+                <a:latin typeface="Calibri"/>
+              </a:defRPr>
+            </a:pPr>
+            <a:r>
+              <a:t>Summary &amp; next steps</a:t>
+            </a:r>
+          </a:p>
+        </p:txBody>
+      </p:sp>
+      <p:sp>
+        <p:nvSpPr>
+          <p:cNvPr id="3" name="TextBox 2"/>
+          <p:cNvSpPr txBox="1"/>
+          <p:nvPr/>
+        </p:nvSpPr>
+        <p:spPr>
+          <a:xfrm>
+            <a:off x="548640" y="1234440"/>
+            <a:ext cx="11064240" cy="4937760"/>
+          </a:xfrm>
+          <a:prstGeom prst="rect">
+            <a:avLst/>
+          </a:prstGeom>
+          <a:noFill/>
+        </p:spPr>
+        <p:txBody>
+          <a:bodyPr wrap="square">
+            <a:noAutofit/>
+          </a:bodyPr>
+          <a:lstStyle/>
+          <a:p>
+            <a:pPr>
+              <a:lnSpc>
+                <a:spcPts val="2200"/>
+              </a:lnSpc>
+              <a:spcAft>
+                <a:spcPts val="1000"/>
+              </a:spcAft>
+              <a:defRPr sz="2000" b="0">
+                <a:solidFill>
+                  <a:srgbClr val="333333"/>
+                </a:solidFill>
+                <a:latin typeface="Calibri"/>
+              </a:defRPr>
+            </a:pPr>
+            <a:r>
+              <a:t>• Understand the SPI protocol (mode 0, signals),</a:t>
+            </a:r>
+          </a:p>
+          <a:p>
+            <a:pPr>
+              <a:lnSpc>
+                <a:spcPts val="2200"/>
+              </a:lnSpc>
+              <a:spcAft>
+                <a:spcPts val="1000"/>
+              </a:spcAft>
+              <a:defRPr sz="2000" b="0">
+                <a:solidFill>
+                  <a:srgbClr val="333333"/>
+                </a:solidFill>
+                <a:latin typeface="Calibri"/>
+              </a:defRPr>
+            </a:pPr>
+            <a:r>
+              <a:t>      translate it to RTL (SPI master, clk_div), and</a:t>
+            </a:r>
+          </a:p>
+          <a:p>
+            <a:pPr>
+              <a:lnSpc>
+                <a:spcPts val="2200"/>
+              </a:lnSpc>
+              <a:spcAft>
+                <a:spcPts val="1000"/>
+              </a:spcAft>
+              <a:defRPr sz="2000" b="0">
+                <a:solidFill>
+                  <a:srgbClr val="333333"/>
+                </a:solidFill>
+                <a:latin typeface="Calibri"/>
+              </a:defRPr>
+            </a:pPr>
+            <a:r>
+              <a:t>      verif…</a:t>
+            </a:r>
+          </a:p>
+          <a:p>
+            <a:pPr>
+              <a:lnSpc>
+                <a:spcPts val="2200"/>
+              </a:lnSpc>
+              <a:spcAft>
+                <a:spcPts val="1000"/>
+              </a:spcAft>
+              <a:defRPr sz="2000" b="0">
+                <a:solidFill>
+                  <a:srgbClr val="333333"/>
+                </a:solidFill>
+                <a:latin typeface="Calibri"/>
+              </a:defRPr>
+            </a:pPr>
+            <a:r>
+              <a:t>• Complete module5/CHECKLIST.md</a:t>
+            </a:r>
+          </a:p>
+          <a:p>
+            <a:pPr>
+              <a:lnSpc>
+                <a:spcPts val="2200"/>
+              </a:lnSpc>
+              <a:spcAft>
+                <a:spcPts val="1000"/>
+              </a:spcAft>
+              <a:defRPr sz="2000" b="0">
+                <a:solidFill>
+                  <a:srgbClr val="333333"/>
+                </a:solidFill>
+                <a:latin typeface="Calibri"/>
+              </a:defRPr>
+            </a:pPr>
+            <a:r>
+              <a:t>• Review module5/EXAMPLES.md and run each lab</a:t>
+            </a:r>
+          </a:p>
+          <a:p>
+            <a:pPr>
+              <a:lnSpc>
+                <a:spcPts val="2200"/>
+              </a:lnSpc>
+              <a:spcAft>
+                <a:spcPts val="1000"/>
+              </a:spcAft>
+              <a:defRPr sz="2000" b="0">
+                <a:solidFill>
+                  <a:srgbClr val="333333"/>
+                </a:solidFill>
+                <a:latin typeface="Calibri"/>
+              </a:defRPr>
+            </a:pPr>
+            <a:r>
+              <a:t>• Next: SPI UVM+SV</a:t>
+            </a:r>
+          </a:p>
+        </p:txBody>
+      </p:sp>
+      <p:sp>
+        <p:nvSpPr>
+          <p:cNvPr id="4" name="TextBox 3"/>
+          <p:cNvSpPr txBox="1"/>
+          <p:nvPr/>
+        </p:nvSpPr>
+        <p:spPr>
+          <a:xfrm>
+            <a:off x="548640" y="6355080"/>
+            <a:ext cx="11064240" cy="320040"/>
+          </a:xfrm>
+          <a:prstGeom prst="rect">
+            <a:avLst/>
+          </a:prstGeom>
+          <a:noFill/>
+        </p:spPr>
+        <p:txBody>
+          <a:bodyPr wrap="square">
+            <a:noAutofit/>
+          </a:bodyPr>
+          <a:lstStyle/>
+          <a:p>
+            <a:pPr algn="r">
+              <a:lnSpc>
+                <a:spcPts val="2200"/>
+              </a:lnSpc>
+              <a:defRPr sz="1000" b="0">
+                <a:solidFill>
+                  <a:srgbClr val="666666"/>
+                </a:solidFill>
+                <a:latin typeface="Calibri"/>
+              </a:defRPr>
+            </a:pPr>
+            <a:r>
+              <a:t>learn_uart_spi_i2c / Module 5</a:t>
+            </a:r>
+          </a:p>
+        </p:txBody>
+      </p:sp>
+    </p:spTree>
+  </p:cSld>
+  <p:clrMapOvr>
+    <a:masterClrMapping/>
+  </p:clrMapOvr>
+</p:sld>
+</file>
+
 <file path=ppt/slides/slide4.xml><?xml version="1.0" encoding="utf-8"?>
 <p:sld xmlns:a="http://schemas.openxmlformats.org/drawingml/2006/main" xmlns:p="http://schemas.openxmlformats.org/presentationml/2006/main" xmlns:r="http://schemas.openxmlformats.org/officeDocument/2006/relationships">
   <p:cSld>
@@ -6241,7 +9131,7 @@
               </a:defRPr>
             </a:pPr>
             <a:r>
-              <a:t>Syllabus topics</a:t>
+              <a:t>How to learn this module</a:t>
             </a:r>
           </a:p>
         </p:txBody>
@@ -6337,7 +9227,7 @@
               </a:defRPr>
             </a:pPr>
             <a:r>
-              <a:t>1. SPI Protocol (Mode 0)</a:t>
+              <a:t>Suggested learning path</a:t>
             </a:r>
           </a:p>
         </p:txBody>
@@ -6379,7 +9269,7 @@
               </a:defRPr>
             </a:pPr>
             <a:r>
-              <a:t>• Signals: sclk (serial clock), mosi (master out,</a:t>
+              <a:t>• Read the detailed SPI learning guide:</a:t>
             </a:r>
           </a:p>
           <a:p>
@@ -6398,7 +9288,7 @@
               </a:defRPr>
             </a:pPr>
             <a:r>
-              <a:t>      slave in), cs_n (active-low chip select). Optional:…</a:t>
+              <a:t>      SPI_LEARNING_GUIDE.md — what SPI is, what kind of</a:t>
             </a:r>
           </a:p>
           <a:p>
@@ -6417,7 +9307,7 @@
               </a:defRPr>
             </a:pPr>
             <a:r>
-              <a:t>• Mode 0 (CPOL=0, CPHA=0): SCLK idles low; data</a:t>
+              <a:t>      protocol (s…</a:t>
             </a:r>
           </a:p>
           <a:p>
@@ -6436,7 +9326,7 @@
               </a:defRPr>
             </a:pPr>
             <a:r>
-              <a:t>      captured on rising edge; data changed on falling</a:t>
+              <a:t>• Read the protocols + UVM overview:</a:t>
             </a:r>
           </a:p>
           <a:p>
@@ -6455,7 +9345,7 @@
               </a:defRPr>
             </a:pPr>
             <a:r>
-              <a:t>      edge.</a:t>
+              <a:t>      LEARNING_GUIDE_PROTOCOLS_AND_UVM.md — Part B § 4.</a:t>
             </a:r>
           </a:p>
           <a:p>
@@ -6474,45 +9364,7 @@
               </a:defRPr>
             </a:pPr>
             <a:r>
-              <a:t>• Timing: One bit per clk_div_tick; clk_div_tick</a:t>
-            </a:r>
-          </a:p>
-          <a:p>
-            <a:pPr>
-              <a:lnSpc>
-                <a:spcPts val="2200"/>
-              </a:lnSpc>
-              <a:spcAft>
-                <a:spcPts val="1000"/>
-              </a:spcAft>
-              <a:defRPr sz="2000" b="0">
-                <a:solidFill>
-                  <a:srgbClr val="333333"/>
-                </a:solidFill>
-                <a:latin typeface="Calibri"/>
-              </a:defRPr>
-            </a:pPr>
-            <a:r>
-              <a:t>      derived from system clock via divider (e.g.</a:t>
-            </a:r>
-          </a:p>
-          <a:p>
-            <a:pPr>
-              <a:lnSpc>
-                <a:spcPts val="2200"/>
-              </a:lnSpc>
-              <a:spcAft>
-                <a:spcPts val="1000"/>
-              </a:spcAft>
-              <a:defRPr sz="2000" b="0">
-                <a:solidFill>
-                  <a:srgbClr val="333333"/>
-                </a:solidFill>
-                <a:latin typeface="Calibri"/>
-              </a:defRPr>
-            </a:pPr>
-            <a:r>
-              <a:t>      DIVIDER=…</a:t>
+              <a:t>      When to Use Ba…</a:t>
             </a:r>
           </a:p>
         </p:txBody>
@@ -6582,8 +9434,8 @@
         </p:nvSpPr>
         <p:spPr>
           <a:xfrm>
-            <a:off x="548640" y="411480"/>
-            <a:ext cx="11064240" cy="777240"/>
+            <a:off x="548640" y="2743200"/>
+            <a:ext cx="11064240" cy="1371600"/>
           </a:xfrm>
           <a:prstGeom prst="rect">
             <a:avLst/>
@@ -6596,11 +9448,11 @@
           </a:bodyPr>
           <a:lstStyle/>
           <a:p>
-            <a:pPr>
-              <a:lnSpc>
-                <a:spcPts val="2200"/>
-              </a:lnSpc>
-              <a:defRPr sz="2800" b="1">
+            <a:pPr algn="ctr">
+              <a:lnSpc>
+                <a:spcPts val="2200"/>
+              </a:lnSpc>
+              <a:defRPr sz="3600" b="1">
                 <a:solidFill>
                   <a:srgbClr val="1A1A2E"/>
                 </a:solidFill>
@@ -6608,7 +9460,7 @@
               </a:defRPr>
             </a:pPr>
             <a:r>
-              <a:t>2. RTL Architecture</a:t>
+              <a:t>Design architecture</a:t>
             </a:r>
           </a:p>
         </p:txBody>
@@ -6616,124 +9468,6 @@
       <p:sp>
         <p:nvSpPr>
           <p:cNvPr id="3" name="TextBox 2"/>
-          <p:cNvSpPr txBox="1"/>
-          <p:nvPr/>
-        </p:nvSpPr>
-        <p:spPr>
-          <a:xfrm>
-            <a:off x="548640" y="1234440"/>
-            <a:ext cx="11064240" cy="4937760"/>
-          </a:xfrm>
-          <a:prstGeom prst="rect">
-            <a:avLst/>
-          </a:prstGeom>
-          <a:noFill/>
-        </p:spPr>
-        <p:txBody>
-          <a:bodyPr wrap="square">
-            <a:noAutofit/>
-          </a:bodyPr>
-          <a:lstStyle/>
-          <a:p>
-            <a:pPr>
-              <a:lnSpc>
-                <a:spcPts val="2200"/>
-              </a:lnSpc>
-              <a:spcAft>
-                <a:spcPts val="1000"/>
-              </a:spcAft>
-              <a:defRPr sz="2000" b="0">
-                <a:solidFill>
-                  <a:srgbClr val="333333"/>
-                </a:solidFill>
-                <a:latin typeface="Calibri"/>
-              </a:defRPr>
-            </a:pPr>
-            <a:r>
-              <a:t>• clk_div: Divides clk; outputs clk_div_tick one cycle</a:t>
-            </a:r>
-          </a:p>
-          <a:p>
-            <a:pPr>
-              <a:lnSpc>
-                <a:spcPts val="2200"/>
-              </a:lnSpc>
-              <a:spcAft>
-                <a:spcPts val="1000"/>
-              </a:spcAft>
-              <a:defRPr sz="2000" b="0">
-                <a:solidFill>
-                  <a:srgbClr val="333333"/>
-                </a:solidFill>
-                <a:latin typeface="Calibri"/>
-              </a:defRPr>
-            </a:pPr>
-            <a:r>
-              <a:t>      every DIVIDER cycles.</a:t>
-            </a:r>
-          </a:p>
-          <a:p>
-            <a:pPr>
-              <a:lnSpc>
-                <a:spcPts val="2200"/>
-              </a:lnSpc>
-              <a:spcAft>
-                <a:spcPts val="1000"/>
-              </a:spcAft>
-              <a:defRPr sz="2000" b="0">
-                <a:solidFill>
-                  <a:srgbClr val="333333"/>
-                </a:solidFill>
-                <a:latin typeface="Calibri"/>
-              </a:defRPr>
-            </a:pPr>
-            <a:r>
-              <a:t>• spi_master: On start, loads data_in into shift</a:t>
-            </a:r>
-          </a:p>
-          <a:p>
-            <a:pPr>
-              <a:lnSpc>
-                <a:spcPts val="2200"/>
-              </a:lnSpc>
-              <a:spcAft>
-                <a:spcPts val="1000"/>
-              </a:spcAft>
-              <a:defRPr sz="2000" b="0">
-                <a:solidFill>
-                  <a:srgbClr val="333333"/>
-                </a:solidFill>
-                <a:latin typeface="Calibri"/>
-              </a:defRPr>
-            </a:pPr>
-            <a:r>
-              <a:t>      register; asserts cs_n low; toggles sclk on</a:t>
-            </a:r>
-          </a:p>
-          <a:p>
-            <a:pPr>
-              <a:lnSpc>
-                <a:spcPts val="2200"/>
-              </a:lnSpc>
-              <a:spcAft>
-                <a:spcPts val="1000"/>
-              </a:spcAft>
-              <a:defRPr sz="2000" b="0">
-                <a:solidFill>
-                  <a:srgbClr val="333333"/>
-                </a:solidFill>
-                <a:latin typeface="Calibri"/>
-              </a:defRPr>
-            </a:pPr>
-            <a:r>
-              <a:t>      clk_div_…</a:t>
-            </a:r>
-          </a:p>
-        </p:txBody>
-      </p:sp>
-      <p:sp>
-        <p:nvSpPr>
-          <p:cNvPr id="4" name="TextBox 3"/>
           <p:cNvSpPr txBox="1"/>
           <p:nvPr/>
         </p:nvSpPr>
@@ -6822,21 +9556,45 @@
               </a:defRPr>
             </a:pPr>
             <a:r>
-              <a:t>3. Basic Testbench</a:t>
-            </a:r>
-          </a:p>
-        </p:txBody>
-      </p:sp>
-      <p:sp>
-        <p:nvSpPr>
-          <p:cNvPr id="3" name="TextBox 2"/>
+              <a:t>RTL / block architecture</a:t>
+            </a:r>
+          </a:p>
+        </p:txBody>
+      </p:sp>
+      <p:pic>
+        <p:nvPicPr>
+          <p:cNvPr id="3" name="Picture 2" descr="rtl_architecture.png"/>
+          <p:cNvPicPr>
+            <a:picLocks noChangeAspect="1"/>
+          </p:cNvPicPr>
+          <p:nvPr/>
+        </p:nvPicPr>
+        <p:blipFill>
+          <a:blip r:embed="rId2"/>
+          <a:stretch>
+            <a:fillRect/>
+          </a:stretch>
+        </p:blipFill>
+        <p:spPr>
+          <a:xfrm>
+            <a:off x="548640" y="1143000"/>
+            <a:ext cx="8128000" cy="4572000"/>
+          </a:xfrm>
+          <a:prstGeom prst="rect">
+            <a:avLst/>
+          </a:prstGeom>
+        </p:spPr>
+      </p:pic>
+      <p:sp>
+        <p:nvSpPr>
+          <p:cNvPr id="4" name="TextBox 3"/>
           <p:cNvSpPr txBox="1"/>
           <p:nvPr/>
         </p:nvSpPr>
         <p:spPr>
           <a:xfrm>
-            <a:off x="548640" y="1234440"/>
-            <a:ext cx="11064240" cy="4937760"/>
+            <a:off x="548640" y="5897880"/>
+            <a:ext cx="11064240" cy="411480"/>
           </a:xfrm>
           <a:prstGeom prst="rect">
             <a:avLst/>
@@ -6853,10 +9611,7 @@
               <a:lnSpc>
                 <a:spcPts val="2200"/>
               </a:lnSpc>
-              <a:spcAft>
-                <a:spcPts val="1000"/>
-              </a:spcAft>
-              <a:defRPr sz="2000" b="0">
+              <a:defRPr sz="1200" b="0">
                 <a:solidFill>
                   <a:srgbClr val="333333"/>
                 </a:solidFill>
@@ -6864,33 +9619,14 @@
               </a:defRPr>
             </a:pPr>
             <a:r>
-              <a:t>• Directed test: Reset release; start=1, data_in=0x55;</a:t>
-            </a:r>
-          </a:p>
-          <a:p>
-            <a:pPr>
-              <a:lnSpc>
-                <a:spcPts val="2200"/>
-              </a:lnSpc>
-              <a:spcAft>
-                <a:spcPts val="1000"/>
-              </a:spcAft>
-              <a:defRPr sz="2000" b="0">
-                <a:solidFill>
-                  <a:srgbClr val="333333"/>
-                </a:solidFill>
-                <a:latin typeface="Calibri"/>
-              </a:defRPr>
-            </a:pPr>
-            <a:r>
-              <a:t>      wait for done; repeat for 0xAA; $finish. Imple…</a:t>
-            </a:r>
-          </a:p>
-        </p:txBody>
-      </p:sp>
-      <p:sp>
-        <p:nvSpPr>
-          <p:cNvPr id="4" name="TextBox 3"/>
+              <a:t>Module 5: DUT / block hierarchy (see module5/examples/).</a:t>
+            </a:r>
+          </a:p>
+        </p:txBody>
+      </p:sp>
+      <p:sp>
+        <p:nvSpPr>
+          <p:cNvPr id="5" name="TextBox 4"/>
           <p:cNvSpPr txBox="1"/>
           <p:nvPr/>
         </p:nvSpPr>
